--- a/slides/04-5-DividingResources.pptx
+++ b/slides/04-5-DividingResources.pptx
@@ -208,7 +208,7 @@
           <a:p>
             <a:fld id="{C5B45307-6ED4-B142-BD64-10F739779302}" type="datetimeFigureOut">
               <a:rPr lang="en-US" smtClean="0"/>
-              <a:t>10/20/25</a:t>
+              <a:t>10/23/25</a:t>
             </a:fld>
             <a:endParaRPr lang="en-US"/>
           </a:p>
@@ -616,7 +616,7 @@
           <a:noFill/>
           <a:extLst>
             <a:ext uri="{909E8E84-426E-40dd-AFC4-6F175D3DCCD1}">
-              <a14:hiddenFill xmlns:a14="http://schemas.microsoft.com/office/drawing/2010/main" xmlns="">
+              <a14:hiddenFill xmlns="" xmlns:a14="http://schemas.microsoft.com/office/drawing/2010/main">
                 <a:solidFill>
                   <a:srgbClr val="FFFFFF"/>
                 </a:solidFill>
@@ -675,7 +675,7 @@
             </a:ln>
             <a:extLst>
               <a:ext uri="{91240B29-F687-4f45-9708-019B960494DF}">
-                <a14:hiddenLine xmlns:a14="http://schemas.microsoft.com/office/drawing/2010/main" xmlns="" w="9525">
+                <a14:hiddenLine xmlns="" xmlns:a14="http://schemas.microsoft.com/office/drawing/2010/main" w="9525">
                   <a:solidFill>
                     <a:srgbClr val="000000"/>
                   </a:solidFill>
@@ -765,7 +765,7 @@
             </a:ln>
             <a:extLst>
               <a:ext uri="{91240B29-F687-4f45-9708-019B960494DF}">
-                <a14:hiddenLine xmlns:a14="http://schemas.microsoft.com/office/drawing/2010/main" xmlns="" w="9525">
+                <a14:hiddenLine xmlns="" xmlns:a14="http://schemas.microsoft.com/office/drawing/2010/main" w="9525">
                   <a:solidFill>
                     <a:srgbClr val="000000"/>
                   </a:solidFill>
@@ -855,7 +855,7 @@
             </a:ln>
             <a:extLst>
               <a:ext uri="{91240B29-F687-4f45-9708-019B960494DF}">
-                <a14:hiddenLine xmlns:a14="http://schemas.microsoft.com/office/drawing/2010/main" xmlns="" w="9525">
+                <a14:hiddenLine xmlns="" xmlns:a14="http://schemas.microsoft.com/office/drawing/2010/main" w="9525">
                   <a:solidFill>
                     <a:srgbClr val="000000"/>
                   </a:solidFill>
@@ -889,7 +889,7 @@
             </a:ln>
             <a:extLst>
               <a:ext uri="{91240B29-F687-4f45-9708-019B960494DF}">
-                <a14:hiddenLine xmlns:a14="http://schemas.microsoft.com/office/drawing/2010/main" xmlns="" w="9525">
+                <a14:hiddenLine xmlns="" xmlns:a14="http://schemas.microsoft.com/office/drawing/2010/main" w="9525">
                   <a:solidFill>
                     <a:srgbClr val="000000"/>
                   </a:solidFill>
@@ -979,7 +979,7 @@
             </a:ln>
             <a:extLst>
               <a:ext uri="{91240B29-F687-4f45-9708-019B960494DF}">
-                <a14:hiddenLine xmlns:a14="http://schemas.microsoft.com/office/drawing/2010/main" xmlns="" w="9525">
+                <a14:hiddenLine xmlns="" xmlns:a14="http://schemas.microsoft.com/office/drawing/2010/main" w="9525">
                   <a:solidFill>
                     <a:srgbClr val="000000"/>
                   </a:solidFill>
@@ -1041,7 +1041,7 @@
             </a:ln>
             <a:extLst>
               <a:ext uri="{91240B29-F687-4f45-9708-019B960494DF}">
-                <a14:hiddenLine xmlns:a14="http://schemas.microsoft.com/office/drawing/2010/main" xmlns="" w="9525">
+                <a14:hiddenLine xmlns="" xmlns:a14="http://schemas.microsoft.com/office/drawing/2010/main" w="9525">
                   <a:solidFill>
                     <a:srgbClr val="000000"/>
                   </a:solidFill>
@@ -1103,7 +1103,7 @@
             </a:ln>
             <a:extLst>
               <a:ext uri="{91240B29-F687-4f45-9708-019B960494DF}">
-                <a14:hiddenLine xmlns:a14="http://schemas.microsoft.com/office/drawing/2010/main" xmlns="" w="9525">
+                <a14:hiddenLine xmlns="" xmlns:a14="http://schemas.microsoft.com/office/drawing/2010/main" w="9525">
                   <a:solidFill>
                     <a:srgbClr val="000000"/>
                   </a:solidFill>
@@ -1193,7 +1193,7 @@
             </a:ln>
             <a:extLst>
               <a:ext uri="{91240B29-F687-4f45-9708-019B960494DF}">
-                <a14:hiddenLine xmlns:a14="http://schemas.microsoft.com/office/drawing/2010/main" xmlns="" w="9525">
+                <a14:hiddenLine xmlns="" xmlns:a14="http://schemas.microsoft.com/office/drawing/2010/main" w="9525">
                   <a:solidFill>
                     <a:srgbClr val="000000"/>
                   </a:solidFill>
@@ -1255,7 +1255,7 @@
             </a:ln>
             <a:extLst>
               <a:ext uri="{91240B29-F687-4f45-9708-019B960494DF}">
-                <a14:hiddenLine xmlns:a14="http://schemas.microsoft.com/office/drawing/2010/main" xmlns="" w="9525">
+                <a14:hiddenLine xmlns="" xmlns:a14="http://schemas.microsoft.com/office/drawing/2010/main" w="9525">
                   <a:solidFill>
                     <a:srgbClr val="000000"/>
                   </a:solidFill>
@@ -1317,7 +1317,7 @@
             </a:ln>
             <a:extLst>
               <a:ext uri="{91240B29-F687-4f45-9708-019B960494DF}">
-                <a14:hiddenLine xmlns:a14="http://schemas.microsoft.com/office/drawing/2010/main" xmlns="" w="9525">
+                <a14:hiddenLine xmlns="" xmlns:a14="http://schemas.microsoft.com/office/drawing/2010/main" w="9525">
                   <a:solidFill>
                     <a:srgbClr val="000000"/>
                   </a:solidFill>
@@ -1407,7 +1407,7 @@
             </a:ln>
             <a:extLst>
               <a:ext uri="{91240B29-F687-4f45-9708-019B960494DF}">
-                <a14:hiddenLine xmlns:a14="http://schemas.microsoft.com/office/drawing/2010/main" xmlns="" w="9525">
+                <a14:hiddenLine xmlns="" xmlns:a14="http://schemas.microsoft.com/office/drawing/2010/main" w="9525">
                   <a:solidFill>
                     <a:srgbClr val="000000"/>
                   </a:solidFill>
@@ -1497,7 +1497,7 @@
             </a:ln>
             <a:extLst>
               <a:ext uri="{91240B29-F687-4f45-9708-019B960494DF}">
-                <a14:hiddenLine xmlns:a14="http://schemas.microsoft.com/office/drawing/2010/main" xmlns="" w="9525">
+                <a14:hiddenLine xmlns="" xmlns:a14="http://schemas.microsoft.com/office/drawing/2010/main" w="9525">
                   <a:solidFill>
                     <a:srgbClr val="000000"/>
                   </a:solidFill>
@@ -1559,7 +1559,7 @@
             </a:ln>
             <a:extLst>
               <a:ext uri="{91240B29-F687-4f45-9708-019B960494DF}">
-                <a14:hiddenLine xmlns:a14="http://schemas.microsoft.com/office/drawing/2010/main" xmlns="" w="9525">
+                <a14:hiddenLine xmlns="" xmlns:a14="http://schemas.microsoft.com/office/drawing/2010/main" w="9525">
                   <a:solidFill>
                     <a:srgbClr val="000000"/>
                   </a:solidFill>
@@ -1669,7 +1669,7 @@
             </a:ln>
             <a:extLst>
               <a:ext uri="{91240B29-F687-4f45-9708-019B960494DF}">
-                <a14:hiddenLine xmlns:a14="http://schemas.microsoft.com/office/drawing/2010/main" xmlns="" w="9525">
+                <a14:hiddenLine xmlns="" xmlns:a14="http://schemas.microsoft.com/office/drawing/2010/main" w="9525">
                   <a:solidFill>
                     <a:srgbClr val="000000"/>
                   </a:solidFill>
@@ -1731,7 +1731,7 @@
             </a:ln>
             <a:extLst>
               <a:ext uri="{91240B29-F687-4f45-9708-019B960494DF}">
-                <a14:hiddenLine xmlns:a14="http://schemas.microsoft.com/office/drawing/2010/main" xmlns="" w="9525">
+                <a14:hiddenLine xmlns="" xmlns:a14="http://schemas.microsoft.com/office/drawing/2010/main" w="9525">
                   <a:solidFill>
                     <a:srgbClr val="000000"/>
                   </a:solidFill>
@@ -1821,7 +1821,7 @@
             </a:ln>
             <a:extLst>
               <a:ext uri="{91240B29-F687-4f45-9708-019B960494DF}">
-                <a14:hiddenLine xmlns:a14="http://schemas.microsoft.com/office/drawing/2010/main" xmlns="" w="9525">
+                <a14:hiddenLine xmlns="" xmlns:a14="http://schemas.microsoft.com/office/drawing/2010/main" w="9525">
                   <a:solidFill>
                     <a:srgbClr val="000000"/>
                   </a:solidFill>
@@ -1911,7 +1911,7 @@
             </a:ln>
             <a:extLst>
               <a:ext uri="{91240B29-F687-4f45-9708-019B960494DF}">
-                <a14:hiddenLine xmlns:a14="http://schemas.microsoft.com/office/drawing/2010/main" xmlns="" w="9525">
+                <a14:hiddenLine xmlns="" xmlns:a14="http://schemas.microsoft.com/office/drawing/2010/main" w="9525">
                   <a:solidFill>
                     <a:srgbClr val="000000"/>
                   </a:solidFill>
@@ -1973,7 +1973,7 @@
             </a:ln>
             <a:extLst>
               <a:ext uri="{91240B29-F687-4f45-9708-019B960494DF}">
-                <a14:hiddenLine xmlns:a14="http://schemas.microsoft.com/office/drawing/2010/main" xmlns="" w="9525">
+                <a14:hiddenLine xmlns="" xmlns:a14="http://schemas.microsoft.com/office/drawing/2010/main" w="9525">
                   <a:solidFill>
                     <a:srgbClr val="000000"/>
                   </a:solidFill>
@@ -2063,7 +2063,7 @@
             </a:ln>
             <a:extLst>
               <a:ext uri="{91240B29-F687-4f45-9708-019B960494DF}">
-                <a14:hiddenLine xmlns:a14="http://schemas.microsoft.com/office/drawing/2010/main" xmlns="" w="9525">
+                <a14:hiddenLine xmlns="" xmlns:a14="http://schemas.microsoft.com/office/drawing/2010/main" w="9525">
                   <a:solidFill>
                     <a:srgbClr val="000000"/>
                   </a:solidFill>
@@ -2153,7 +2153,7 @@
             </a:ln>
             <a:extLst>
               <a:ext uri="{91240B29-F687-4f45-9708-019B960494DF}">
-                <a14:hiddenLine xmlns:a14="http://schemas.microsoft.com/office/drawing/2010/main" xmlns="" w="9525">
+                <a14:hiddenLine xmlns="" xmlns:a14="http://schemas.microsoft.com/office/drawing/2010/main" w="9525">
                   <a:solidFill>
                     <a:srgbClr val="000000"/>
                   </a:solidFill>
@@ -2209,7 +2209,7 @@
             </a:ln>
             <a:extLst>
               <a:ext uri="{91240B29-F687-4f45-9708-019B960494DF}">
-                <a14:hiddenLine xmlns:a14="http://schemas.microsoft.com/office/drawing/2010/main" xmlns="" w="9525">
+                <a14:hiddenLine xmlns="" xmlns:a14="http://schemas.microsoft.com/office/drawing/2010/main" w="9525">
                   <a:solidFill>
                     <a:srgbClr val="000000"/>
                   </a:solidFill>
@@ -2299,7 +2299,7 @@
             </a:ln>
             <a:extLst>
               <a:ext uri="{91240B29-F687-4f45-9708-019B960494DF}">
-                <a14:hiddenLine xmlns:a14="http://schemas.microsoft.com/office/drawing/2010/main" xmlns="" w="9525">
+                <a14:hiddenLine xmlns="" xmlns:a14="http://schemas.microsoft.com/office/drawing/2010/main" w="9525">
                   <a:solidFill>
                     <a:srgbClr val="000000"/>
                   </a:solidFill>
@@ -2355,7 +2355,7 @@
             </a:ln>
             <a:extLst>
               <a:ext uri="{91240B29-F687-4f45-9708-019B960494DF}">
-                <a14:hiddenLine xmlns:a14="http://schemas.microsoft.com/office/drawing/2010/main" xmlns="" w="9525">
+                <a14:hiddenLine xmlns="" xmlns:a14="http://schemas.microsoft.com/office/drawing/2010/main" w="9525">
                   <a:solidFill>
                     <a:srgbClr val="000000"/>
                   </a:solidFill>
@@ -2445,7 +2445,7 @@
             </a:ln>
             <a:extLst>
               <a:ext uri="{91240B29-F687-4f45-9708-019B960494DF}">
-                <a14:hiddenLine xmlns:a14="http://schemas.microsoft.com/office/drawing/2010/main" xmlns="" w="9525">
+                <a14:hiddenLine xmlns="" xmlns:a14="http://schemas.microsoft.com/office/drawing/2010/main" w="9525">
                   <a:solidFill>
                     <a:srgbClr val="000000"/>
                   </a:solidFill>
@@ -2513,7 +2513,7 @@
             </a:ln>
             <a:extLst>
               <a:ext uri="{91240B29-F687-4f45-9708-019B960494DF}">
-                <a14:hiddenLine xmlns:a14="http://schemas.microsoft.com/office/drawing/2010/main" xmlns="" w="9525">
+                <a14:hiddenLine xmlns="" xmlns:a14="http://schemas.microsoft.com/office/drawing/2010/main" w="9525">
                   <a:solidFill>
                     <a:srgbClr val="000000"/>
                   </a:solidFill>
@@ -2603,7 +2603,7 @@
             </a:ln>
             <a:extLst>
               <a:ext uri="{91240B29-F687-4f45-9708-019B960494DF}">
-                <a14:hiddenLine xmlns:a14="http://schemas.microsoft.com/office/drawing/2010/main" xmlns="" w="9525">
+                <a14:hiddenLine xmlns="" xmlns:a14="http://schemas.microsoft.com/office/drawing/2010/main" w="9525">
                   <a:solidFill>
                     <a:srgbClr val="000000"/>
                   </a:solidFill>
@@ -2671,7 +2671,7 @@
             </a:ln>
             <a:extLst>
               <a:ext uri="{91240B29-F687-4f45-9708-019B960494DF}">
-                <a14:hiddenLine xmlns:a14="http://schemas.microsoft.com/office/drawing/2010/main" xmlns="" w="9525">
+                <a14:hiddenLine xmlns="" xmlns:a14="http://schemas.microsoft.com/office/drawing/2010/main" w="9525">
                   <a:solidFill>
                     <a:srgbClr val="000000"/>
                   </a:solidFill>
@@ -2761,7 +2761,7 @@
             </a:ln>
             <a:extLst>
               <a:ext uri="{91240B29-F687-4f45-9708-019B960494DF}">
-                <a14:hiddenLine xmlns:a14="http://schemas.microsoft.com/office/drawing/2010/main" xmlns="" w="9525">
+                <a14:hiddenLine xmlns="" xmlns:a14="http://schemas.microsoft.com/office/drawing/2010/main" w="9525">
                   <a:solidFill>
                     <a:srgbClr val="000000"/>
                   </a:solidFill>
@@ -2795,7 +2795,7 @@
             </a:ln>
             <a:extLst>
               <a:ext uri="{91240B29-F687-4f45-9708-019B960494DF}">
-                <a14:hiddenLine xmlns:a14="http://schemas.microsoft.com/office/drawing/2010/main" xmlns="" w="9525">
+                <a14:hiddenLine xmlns="" xmlns:a14="http://schemas.microsoft.com/office/drawing/2010/main" w="9525">
                   <a:solidFill>
                     <a:srgbClr val="000000"/>
                   </a:solidFill>
@@ -2885,7 +2885,7 @@
             </a:ln>
             <a:extLst>
               <a:ext uri="{91240B29-F687-4f45-9708-019B960494DF}">
-                <a14:hiddenLine xmlns:a14="http://schemas.microsoft.com/office/drawing/2010/main" xmlns="" w="9525">
+                <a14:hiddenLine xmlns="" xmlns:a14="http://schemas.microsoft.com/office/drawing/2010/main" w="9525">
                   <a:solidFill>
                     <a:srgbClr val="000000"/>
                   </a:solidFill>
@@ -2947,7 +2947,7 @@
             </a:ln>
             <a:extLst>
               <a:ext uri="{91240B29-F687-4f45-9708-019B960494DF}">
-                <a14:hiddenLine xmlns:a14="http://schemas.microsoft.com/office/drawing/2010/main" xmlns="" w="9525">
+                <a14:hiddenLine xmlns="" xmlns:a14="http://schemas.microsoft.com/office/drawing/2010/main" w="9525">
                   <a:solidFill>
                     <a:srgbClr val="000000"/>
                   </a:solidFill>
@@ -3009,7 +3009,7 @@
             </a:ln>
             <a:extLst>
               <a:ext uri="{91240B29-F687-4f45-9708-019B960494DF}">
-                <a14:hiddenLine xmlns:a14="http://schemas.microsoft.com/office/drawing/2010/main" xmlns="" w="9525">
+                <a14:hiddenLine xmlns="" xmlns:a14="http://schemas.microsoft.com/office/drawing/2010/main" w="9525">
                   <a:solidFill>
                     <a:srgbClr val="000000"/>
                   </a:solidFill>
@@ -3099,7 +3099,7 @@
             </a:ln>
             <a:extLst>
               <a:ext uri="{91240B29-F687-4f45-9708-019B960494DF}">
-                <a14:hiddenLine xmlns:a14="http://schemas.microsoft.com/office/drawing/2010/main" xmlns="" w="9525">
+                <a14:hiddenLine xmlns="" xmlns:a14="http://schemas.microsoft.com/office/drawing/2010/main" w="9525">
                   <a:solidFill>
                     <a:srgbClr val="000000"/>
                   </a:solidFill>
@@ -3167,7 +3167,7 @@
             </a:ln>
             <a:extLst>
               <a:ext uri="{91240B29-F687-4f45-9708-019B960494DF}">
-                <a14:hiddenLine xmlns:a14="http://schemas.microsoft.com/office/drawing/2010/main" xmlns="" w="9525">
+                <a14:hiddenLine xmlns="" xmlns:a14="http://schemas.microsoft.com/office/drawing/2010/main" w="9525">
                   <a:solidFill>
                     <a:srgbClr val="000000"/>
                   </a:solidFill>
@@ -3229,7 +3229,7 @@
             </a:ln>
             <a:extLst>
               <a:ext uri="{91240B29-F687-4f45-9708-019B960494DF}">
-                <a14:hiddenLine xmlns:a14="http://schemas.microsoft.com/office/drawing/2010/main" xmlns="" w="9525">
+                <a14:hiddenLine xmlns="" xmlns:a14="http://schemas.microsoft.com/office/drawing/2010/main" w="9525">
                   <a:solidFill>
                     <a:srgbClr val="000000"/>
                   </a:solidFill>
@@ -3319,7 +3319,7 @@
             </a:ln>
             <a:extLst>
               <a:ext uri="{91240B29-F687-4f45-9708-019B960494DF}">
-                <a14:hiddenLine xmlns:a14="http://schemas.microsoft.com/office/drawing/2010/main" xmlns="" w="9525">
+                <a14:hiddenLine xmlns="" xmlns:a14="http://schemas.microsoft.com/office/drawing/2010/main" w="9525">
                   <a:solidFill>
                     <a:srgbClr val="000000"/>
                   </a:solidFill>
@@ -3381,7 +3381,7 @@
             </a:ln>
             <a:extLst>
               <a:ext uri="{91240B29-F687-4f45-9708-019B960494DF}">
-                <a14:hiddenLine xmlns:a14="http://schemas.microsoft.com/office/drawing/2010/main" xmlns="" w="9525">
+                <a14:hiddenLine xmlns="" xmlns:a14="http://schemas.microsoft.com/office/drawing/2010/main" w="9525">
                   <a:solidFill>
                     <a:srgbClr val="000000"/>
                   </a:solidFill>
@@ -3471,7 +3471,7 @@
             </a:ln>
             <a:extLst>
               <a:ext uri="{91240B29-F687-4f45-9708-019B960494DF}">
-                <a14:hiddenLine xmlns:a14="http://schemas.microsoft.com/office/drawing/2010/main" xmlns="" w="9525">
+                <a14:hiddenLine xmlns="" xmlns:a14="http://schemas.microsoft.com/office/drawing/2010/main" w="9525">
                   <a:solidFill>
                     <a:srgbClr val="000000"/>
                   </a:solidFill>
@@ -3533,7 +3533,7 @@
             </a:ln>
             <a:extLst>
               <a:ext uri="{91240B29-F687-4f45-9708-019B960494DF}">
-                <a14:hiddenLine xmlns:a14="http://schemas.microsoft.com/office/drawing/2010/main" xmlns="" w="9525">
+                <a14:hiddenLine xmlns="" xmlns:a14="http://schemas.microsoft.com/office/drawing/2010/main" w="9525">
                   <a:solidFill>
                     <a:srgbClr val="000000"/>
                   </a:solidFill>
@@ -3623,7 +3623,7 @@
             </a:ln>
             <a:extLst>
               <a:ext uri="{91240B29-F687-4f45-9708-019B960494DF}">
-                <a14:hiddenLine xmlns:a14="http://schemas.microsoft.com/office/drawing/2010/main" xmlns="" w="9525">
+                <a14:hiddenLine xmlns="" xmlns:a14="http://schemas.microsoft.com/office/drawing/2010/main" w="9525">
                   <a:solidFill>
                     <a:srgbClr val="000000"/>
                   </a:solidFill>
@@ -3657,7 +3657,7 @@
             </a:ln>
             <a:extLst>
               <a:ext uri="{91240B29-F687-4f45-9708-019B960494DF}">
-                <a14:hiddenLine xmlns:a14="http://schemas.microsoft.com/office/drawing/2010/main" xmlns="" w="9525">
+                <a14:hiddenLine xmlns="" xmlns:a14="http://schemas.microsoft.com/office/drawing/2010/main" w="9525">
                   <a:solidFill>
                     <a:srgbClr val="000000"/>
                   </a:solidFill>
@@ -3722,7 +3722,7 @@
             </a:ln>
             <a:extLst>
               <a:ext uri="{91240B29-F687-4f45-9708-019B960494DF}">
-                <a14:hiddenLine xmlns:a14="http://schemas.microsoft.com/office/drawing/2010/main" xmlns="" w="9525">
+                <a14:hiddenLine xmlns="" xmlns:a14="http://schemas.microsoft.com/office/drawing/2010/main" w="9525">
                   <a:solidFill>
                     <a:srgbClr val="000000"/>
                   </a:solidFill>
@@ -3812,7 +3812,7 @@
             </a:ln>
             <a:extLst>
               <a:ext uri="{91240B29-F687-4f45-9708-019B960494DF}">
-                <a14:hiddenLine xmlns:a14="http://schemas.microsoft.com/office/drawing/2010/main" xmlns="" w="9525">
+                <a14:hiddenLine xmlns="" xmlns:a14="http://schemas.microsoft.com/office/drawing/2010/main" w="9525">
                   <a:solidFill>
                     <a:srgbClr val="000000"/>
                   </a:solidFill>
@@ -3874,7 +3874,7 @@
             </a:ln>
             <a:extLst>
               <a:ext uri="{91240B29-F687-4f45-9708-019B960494DF}">
-                <a14:hiddenLine xmlns:a14="http://schemas.microsoft.com/office/drawing/2010/main" xmlns="" w="9525">
+                <a14:hiddenLine xmlns="" xmlns:a14="http://schemas.microsoft.com/office/drawing/2010/main" w="9525">
                   <a:solidFill>
                     <a:srgbClr val="000000"/>
                   </a:solidFill>
@@ -3964,7 +3964,7 @@
             </a:ln>
             <a:extLst>
               <a:ext uri="{91240B29-F687-4f45-9708-019B960494DF}">
-                <a14:hiddenLine xmlns:a14="http://schemas.microsoft.com/office/drawing/2010/main" xmlns="" w="9525">
+                <a14:hiddenLine xmlns="" xmlns:a14="http://schemas.microsoft.com/office/drawing/2010/main" w="9525">
                   <a:solidFill>
                     <a:srgbClr val="000000"/>
                   </a:solidFill>
@@ -4054,7 +4054,7 @@
             </a:ln>
             <a:extLst>
               <a:ext uri="{91240B29-F687-4f45-9708-019B960494DF}">
-                <a14:hiddenLine xmlns:a14="http://schemas.microsoft.com/office/drawing/2010/main" xmlns="" w="9525">
+                <a14:hiddenLine xmlns="" xmlns:a14="http://schemas.microsoft.com/office/drawing/2010/main" w="9525">
                   <a:solidFill>
                     <a:srgbClr val="000000"/>
                   </a:solidFill>
@@ -4119,7 +4119,7 @@
             </a:ln>
             <a:extLst>
               <a:ext uri="{91240B29-F687-4f45-9708-019B960494DF}">
-                <a14:hiddenLine xmlns:a14="http://schemas.microsoft.com/office/drawing/2010/main" xmlns="" w="9525">
+                <a14:hiddenLine xmlns="" xmlns:a14="http://schemas.microsoft.com/office/drawing/2010/main" w="9525">
                   <a:solidFill>
                     <a:srgbClr val="000000"/>
                   </a:solidFill>
@@ -4181,7 +4181,7 @@
             </a:ln>
             <a:extLst>
               <a:ext uri="{91240B29-F687-4f45-9708-019B960494DF}">
-                <a14:hiddenLine xmlns:a14="http://schemas.microsoft.com/office/drawing/2010/main" xmlns="" w="9525">
+                <a14:hiddenLine xmlns="" xmlns:a14="http://schemas.microsoft.com/office/drawing/2010/main" w="9525">
                   <a:solidFill>
                     <a:srgbClr val="000000"/>
                   </a:solidFill>
@@ -4271,7 +4271,7 @@
             </a:ln>
             <a:extLst>
               <a:ext uri="{91240B29-F687-4f45-9708-019B960494DF}">
-                <a14:hiddenLine xmlns:a14="http://schemas.microsoft.com/office/drawing/2010/main" xmlns="" w="9525">
+                <a14:hiddenLine xmlns="" xmlns:a14="http://schemas.microsoft.com/office/drawing/2010/main" w="9525">
                   <a:solidFill>
                     <a:srgbClr val="000000"/>
                   </a:solidFill>
@@ -4361,7 +4361,7 @@
             </a:ln>
             <a:extLst>
               <a:ext uri="{91240B29-F687-4f45-9708-019B960494DF}">
-                <a14:hiddenLine xmlns:a14="http://schemas.microsoft.com/office/drawing/2010/main" xmlns="" w="9525">
+                <a14:hiddenLine xmlns="" xmlns:a14="http://schemas.microsoft.com/office/drawing/2010/main" w="9525">
                   <a:solidFill>
                     <a:srgbClr val="000000"/>
                   </a:solidFill>
@@ -4423,7 +4423,7 @@
             </a:ln>
             <a:extLst>
               <a:ext uri="{91240B29-F687-4f45-9708-019B960494DF}">
-                <a14:hiddenLine xmlns:a14="http://schemas.microsoft.com/office/drawing/2010/main" xmlns="" w="9525">
+                <a14:hiddenLine xmlns="" xmlns:a14="http://schemas.microsoft.com/office/drawing/2010/main" w="9525">
                   <a:solidFill>
                     <a:srgbClr val="000000"/>
                   </a:solidFill>
@@ -4543,7 +4543,7 @@
             </a:ln>
             <a:extLst>
               <a:ext uri="{91240B29-F687-4f45-9708-019B960494DF}">
-                <a14:hiddenLine xmlns:a14="http://schemas.microsoft.com/office/drawing/2010/main" xmlns="" w="9525">
+                <a14:hiddenLine xmlns="" xmlns:a14="http://schemas.microsoft.com/office/drawing/2010/main" w="9525">
                   <a:solidFill>
                     <a:srgbClr val="000000"/>
                   </a:solidFill>
@@ -4611,7 +4611,7 @@
             </a:ln>
             <a:extLst>
               <a:ext uri="{91240B29-F687-4f45-9708-019B960494DF}">
-                <a14:hiddenLine xmlns:a14="http://schemas.microsoft.com/office/drawing/2010/main" xmlns="" w="9525">
+                <a14:hiddenLine xmlns="" xmlns:a14="http://schemas.microsoft.com/office/drawing/2010/main" w="9525">
                   <a:solidFill>
                     <a:srgbClr val="000000"/>
                   </a:solidFill>
@@ -4701,7 +4701,7 @@
             </a:ln>
             <a:extLst>
               <a:ext uri="{91240B29-F687-4f45-9708-019B960494DF}">
-                <a14:hiddenLine xmlns:a14="http://schemas.microsoft.com/office/drawing/2010/main" xmlns="" w="9525">
+                <a14:hiddenLine xmlns="" xmlns:a14="http://schemas.microsoft.com/office/drawing/2010/main" w="9525">
                   <a:solidFill>
                     <a:srgbClr val="000000"/>
                   </a:solidFill>
@@ -4841,7 +4841,7 @@
           <a:p>
             <a:fld id="{02CD26A6-15A2-B449-9218-85BDE57EBA42}" type="datetime1">
               <a:rPr lang="en-US" smtClean="0"/>
-              <a:t>10/20/25</a:t>
+              <a:t>10/23/25</a:t>
             </a:fld>
             <a:endParaRPr lang="en-US"/>
           </a:p>
@@ -5108,7 +5108,7 @@
           <a:p>
             <a:fld id="{86196231-FA13-E844-B7A9-39406EF14982}" type="datetime1">
               <a:rPr lang="en-US" smtClean="0"/>
-              <a:t>10/20/25</a:t>
+              <a:t>10/23/25</a:t>
             </a:fld>
             <a:endParaRPr lang="en-US"/>
           </a:p>
@@ -5304,7 +5304,7 @@
           <a:p>
             <a:fld id="{F8A175EF-9ECA-B54E-B5F1-E9A7ECD1A9A7}" type="datetime1">
               <a:rPr lang="en-US" smtClean="0"/>
-              <a:t>10/20/25</a:t>
+              <a:t>10/23/25</a:t>
             </a:fld>
             <a:endParaRPr lang="en-US"/>
           </a:p>
@@ -5567,7 +5567,7 @@
           <a:p>
             <a:fld id="{500354CC-C6D3-2343-B23F-7899CBC1D23F}" type="datetime1">
               <a:rPr lang="en-US" smtClean="0"/>
-              <a:t>10/20/25</a:t>
+              <a:t>10/23/25</a:t>
             </a:fld>
             <a:endParaRPr lang="en-US"/>
           </a:p>
@@ -6001,7 +6001,7 @@
           <a:p>
             <a:fld id="{91A73A3F-0738-3A4B-9460-155F524D47D2}" type="datetime1">
               <a:rPr lang="en-US" smtClean="0"/>
-              <a:t>10/20/25</a:t>
+              <a:t>10/23/25</a:t>
             </a:fld>
             <a:endParaRPr lang="en-US"/>
           </a:p>
@@ -6547,7 +6547,7 @@
           <a:p>
             <a:fld id="{7377266C-1F81-3F4F-9E28-AFBFE5E15350}" type="datetime1">
               <a:rPr lang="en-US" smtClean="0"/>
-              <a:t>10/20/25</a:t>
+              <a:t>10/23/25</a:t>
             </a:fld>
             <a:endParaRPr lang="en-US"/>
           </a:p>
@@ -7267,7 +7267,7 @@
           <a:p>
             <a:fld id="{9025C51A-5B64-744E-84CD-F53E0FA92537}" type="datetime1">
               <a:rPr lang="en-US" smtClean="0"/>
-              <a:t>10/20/25</a:t>
+              <a:t>10/23/25</a:t>
             </a:fld>
             <a:endParaRPr lang="en-US"/>
           </a:p>
@@ -7437,7 +7437,7 @@
           <a:p>
             <a:fld id="{4DCA85F3-FE26-6F4E-A395-CAB36C7DE96B}" type="datetime1">
               <a:rPr lang="en-US" smtClean="0"/>
-              <a:t>10/20/25</a:t>
+              <a:t>10/23/25</a:t>
             </a:fld>
             <a:endParaRPr lang="en-US"/>
           </a:p>
@@ -7617,7 +7617,7 @@
           <a:p>
             <a:fld id="{93668D8C-2310-1F49-8704-ED0A872C1D76}" type="datetime1">
               <a:rPr lang="en-US" smtClean="0"/>
-              <a:t>10/20/25</a:t>
+              <a:t>10/23/25</a:t>
             </a:fld>
             <a:endParaRPr lang="en-US"/>
           </a:p>
@@ -7787,7 +7787,7 @@
           <a:p>
             <a:fld id="{1AE8176D-7614-0047-BF7D-0D7213955B60}" type="datetime1">
               <a:rPr lang="en-US" smtClean="0"/>
-              <a:t>10/20/25</a:t>
+              <a:t>10/23/25</a:t>
             </a:fld>
             <a:endParaRPr lang="en-US"/>
           </a:p>
@@ -8037,7 +8037,7 @@
           <a:p>
             <a:fld id="{BBD3DFC6-3AF6-5F40-9115-61971812DEC9}" type="datetime1">
               <a:rPr lang="en-US" smtClean="0"/>
-              <a:t>10/20/25</a:t>
+              <a:t>10/23/25</a:t>
             </a:fld>
             <a:endParaRPr lang="en-US"/>
           </a:p>
@@ -8269,7 +8269,7 @@
           <a:p>
             <a:fld id="{B9ED4E90-35C8-E14C-B1F1-9C55AFA0B23D}" type="datetime1">
               <a:rPr lang="en-US" smtClean="0"/>
-              <a:t>10/20/25</a:t>
+              <a:t>10/23/25</a:t>
             </a:fld>
             <a:endParaRPr lang="en-US"/>
           </a:p>
@@ -8655,7 +8655,7 @@
           <a:p>
             <a:fld id="{E46EEFC5-06EE-864E-8985-D4A3572367C6}" type="datetime1">
               <a:rPr lang="en-US" smtClean="0"/>
-              <a:t>10/20/25</a:t>
+              <a:t>10/23/25</a:t>
             </a:fld>
             <a:endParaRPr lang="en-US"/>
           </a:p>
@@ -8778,7 +8778,7 @@
           <a:p>
             <a:fld id="{8AFAEA8D-371E-E449-A3CD-D4BC4ACAE00B}" type="datetime1">
               <a:rPr lang="en-US" smtClean="0"/>
-              <a:t>10/20/25</a:t>
+              <a:t>10/23/25</a:t>
             </a:fld>
             <a:endParaRPr lang="en-US"/>
           </a:p>
@@ -8873,7 +8873,7 @@
           <a:p>
             <a:fld id="{995DCDE8-2B30-9C4B-9524-B7B866851B77}" type="datetime1">
               <a:rPr lang="en-US" smtClean="0"/>
-              <a:t>10/20/25</a:t>
+              <a:t>10/23/25</a:t>
             </a:fld>
             <a:endParaRPr lang="en-US"/>
           </a:p>
@@ -9122,7 +9122,7 @@
           <a:p>
             <a:fld id="{29D79D64-9F73-834A-BB33-5400411F3A00}" type="datetime1">
               <a:rPr lang="en-US" smtClean="0"/>
-              <a:t>10/20/25</a:t>
+              <a:t>10/23/25</a:t>
             </a:fld>
             <a:endParaRPr lang="en-US"/>
           </a:p>
@@ -9407,7 +9407,7 @@
           <a:p>
             <a:fld id="{9A1452D3-087A-BD44-B9C8-6816C7755A34}" type="datetime1">
               <a:rPr lang="en-US" smtClean="0"/>
-              <a:t>10/20/25</a:t>
+              <a:t>10/23/25</a:t>
             </a:fld>
             <a:endParaRPr lang="en-US"/>
           </a:p>
@@ -9530,7 +9530,7 @@
           <a:noFill/>
           <a:extLst>
             <a:ext uri="{909E8E84-426E-40dd-AFC4-6F175D3DCCD1}">
-              <a14:hiddenFill xmlns:a14="http://schemas.microsoft.com/office/drawing/2010/main" xmlns="">
+              <a14:hiddenFill xmlns="" xmlns:a14="http://schemas.microsoft.com/office/drawing/2010/main">
                 <a:solidFill>
                   <a:srgbClr val="FFFFFF"/>
                 </a:solidFill>
@@ -9604,7 +9604,7 @@
               </a:ln>
               <a:extLst>
                 <a:ext uri="{91240B29-F687-4f45-9708-019B960494DF}">
-                  <a14:hiddenLine xmlns:a14="http://schemas.microsoft.com/office/drawing/2010/main" xmlns="" w="9525">
+                  <a14:hiddenLine xmlns="" xmlns:a14="http://schemas.microsoft.com/office/drawing/2010/main" w="9525">
                     <a:solidFill>
                       <a:srgbClr val="000000"/>
                     </a:solidFill>
@@ -9694,7 +9694,7 @@
               </a:ln>
               <a:extLst>
                 <a:ext uri="{91240B29-F687-4f45-9708-019B960494DF}">
-                  <a14:hiddenLine xmlns:a14="http://schemas.microsoft.com/office/drawing/2010/main" xmlns="" w="9525">
+                  <a14:hiddenLine xmlns="" xmlns:a14="http://schemas.microsoft.com/office/drawing/2010/main" w="9525">
                     <a:solidFill>
                       <a:srgbClr val="000000"/>
                     </a:solidFill>
@@ -9784,7 +9784,7 @@
               </a:ln>
               <a:extLst>
                 <a:ext uri="{91240B29-F687-4f45-9708-019B960494DF}">
-                  <a14:hiddenLine xmlns:a14="http://schemas.microsoft.com/office/drawing/2010/main" xmlns="" w="9525">
+                  <a14:hiddenLine xmlns="" xmlns:a14="http://schemas.microsoft.com/office/drawing/2010/main" w="9525">
                     <a:solidFill>
                       <a:srgbClr val="000000"/>
                     </a:solidFill>
@@ -9846,7 +9846,7 @@
               </a:ln>
               <a:extLst>
                 <a:ext uri="{91240B29-F687-4f45-9708-019B960494DF}">
-                  <a14:hiddenLine xmlns:a14="http://schemas.microsoft.com/office/drawing/2010/main" xmlns="" w="9525">
+                  <a14:hiddenLine xmlns="" xmlns:a14="http://schemas.microsoft.com/office/drawing/2010/main" w="9525">
                     <a:solidFill>
                       <a:srgbClr val="000000"/>
                     </a:solidFill>
@@ -9936,7 +9936,7 @@
               </a:ln>
               <a:extLst>
                 <a:ext uri="{91240B29-F687-4f45-9708-019B960494DF}">
-                  <a14:hiddenLine xmlns:a14="http://schemas.microsoft.com/office/drawing/2010/main" xmlns="" w="9525">
+                  <a14:hiddenLine xmlns="" xmlns:a14="http://schemas.microsoft.com/office/drawing/2010/main" w="9525">
                     <a:solidFill>
                       <a:srgbClr val="000000"/>
                     </a:solidFill>
@@ -9998,7 +9998,7 @@
               </a:ln>
               <a:extLst>
                 <a:ext uri="{91240B29-F687-4f45-9708-019B960494DF}">
-                  <a14:hiddenLine xmlns:a14="http://schemas.microsoft.com/office/drawing/2010/main" xmlns="" w="9525">
+                  <a14:hiddenLine xmlns="" xmlns:a14="http://schemas.microsoft.com/office/drawing/2010/main" w="9525">
                     <a:solidFill>
                       <a:srgbClr val="000000"/>
                     </a:solidFill>
@@ -10060,7 +10060,7 @@
               </a:ln>
               <a:extLst>
                 <a:ext uri="{91240B29-F687-4f45-9708-019B960494DF}">
-                  <a14:hiddenLine xmlns:a14="http://schemas.microsoft.com/office/drawing/2010/main" xmlns="" w="9525">
+                  <a14:hiddenLine xmlns="" xmlns:a14="http://schemas.microsoft.com/office/drawing/2010/main" w="9525">
                     <a:solidFill>
                       <a:srgbClr val="000000"/>
                     </a:solidFill>
@@ -10150,7 +10150,7 @@
               </a:ln>
               <a:extLst>
                 <a:ext uri="{91240B29-F687-4f45-9708-019B960494DF}">
-                  <a14:hiddenLine xmlns:a14="http://schemas.microsoft.com/office/drawing/2010/main" xmlns="" w="9525">
+                  <a14:hiddenLine xmlns="" xmlns:a14="http://schemas.microsoft.com/office/drawing/2010/main" w="9525">
                     <a:solidFill>
                       <a:srgbClr val="000000"/>
                     </a:solidFill>
@@ -10240,7 +10240,7 @@
               </a:ln>
               <a:extLst>
                 <a:ext uri="{91240B29-F687-4f45-9708-019B960494DF}">
-                  <a14:hiddenLine xmlns:a14="http://schemas.microsoft.com/office/drawing/2010/main" xmlns="" w="9525">
+                  <a14:hiddenLine xmlns="" xmlns:a14="http://schemas.microsoft.com/office/drawing/2010/main" w="9525">
                     <a:solidFill>
                       <a:srgbClr val="000000"/>
                     </a:solidFill>
@@ -10302,7 +10302,7 @@
               </a:ln>
               <a:extLst>
                 <a:ext uri="{91240B29-F687-4f45-9708-019B960494DF}">
-                  <a14:hiddenLine xmlns:a14="http://schemas.microsoft.com/office/drawing/2010/main" xmlns="" w="9525">
+                  <a14:hiddenLine xmlns="" xmlns:a14="http://schemas.microsoft.com/office/drawing/2010/main" w="9525">
                     <a:solidFill>
                       <a:srgbClr val="000000"/>
                     </a:solidFill>
@@ -10412,7 +10412,7 @@
               </a:ln>
               <a:extLst>
                 <a:ext uri="{91240B29-F687-4f45-9708-019B960494DF}">
-                  <a14:hiddenLine xmlns:a14="http://schemas.microsoft.com/office/drawing/2010/main" xmlns="" w="9525">
+                  <a14:hiddenLine xmlns="" xmlns:a14="http://schemas.microsoft.com/office/drawing/2010/main" w="9525">
                     <a:solidFill>
                       <a:srgbClr val="000000"/>
                     </a:solidFill>
@@ -10496,7 +10496,7 @@
               </a:ln>
               <a:extLst>
                 <a:ext uri="{91240B29-F687-4f45-9708-019B960494DF}">
-                  <a14:hiddenLine xmlns:a14="http://schemas.microsoft.com/office/drawing/2010/main" xmlns="" w="9525">
+                  <a14:hiddenLine xmlns="" xmlns:a14="http://schemas.microsoft.com/office/drawing/2010/main" w="9525">
                     <a:solidFill>
                       <a:srgbClr val="000000"/>
                     </a:solidFill>
@@ -10558,7 +10558,7 @@
               </a:ln>
               <a:extLst>
                 <a:ext uri="{91240B29-F687-4f45-9708-019B960494DF}">
-                  <a14:hiddenLine xmlns:a14="http://schemas.microsoft.com/office/drawing/2010/main" xmlns="" w="9525">
+                  <a14:hiddenLine xmlns="" xmlns:a14="http://schemas.microsoft.com/office/drawing/2010/main" w="9525">
                     <a:solidFill>
                       <a:srgbClr val="000000"/>
                     </a:solidFill>
@@ -10620,7 +10620,7 @@
               </a:ln>
               <a:extLst>
                 <a:ext uri="{91240B29-F687-4f45-9708-019B960494DF}">
-                  <a14:hiddenLine xmlns:a14="http://schemas.microsoft.com/office/drawing/2010/main" xmlns="" w="9525">
+                  <a14:hiddenLine xmlns="" xmlns:a14="http://schemas.microsoft.com/office/drawing/2010/main" w="9525">
                     <a:solidFill>
                       <a:srgbClr val="000000"/>
                     </a:solidFill>
@@ -10710,7 +10710,7 @@
               </a:ln>
               <a:extLst>
                 <a:ext uri="{91240B29-F687-4f45-9708-019B960494DF}">
-                  <a14:hiddenLine xmlns:a14="http://schemas.microsoft.com/office/drawing/2010/main" xmlns="" w="9525">
+                  <a14:hiddenLine xmlns="" xmlns:a14="http://schemas.microsoft.com/office/drawing/2010/main" w="9525">
                     <a:solidFill>
                       <a:srgbClr val="000000"/>
                     </a:solidFill>
@@ -10744,7 +10744,7 @@
               </a:ln>
               <a:extLst>
                 <a:ext uri="{91240B29-F687-4f45-9708-019B960494DF}">
-                  <a14:hiddenLine xmlns:a14="http://schemas.microsoft.com/office/drawing/2010/main" xmlns="" w="9525">
+                  <a14:hiddenLine xmlns="" xmlns:a14="http://schemas.microsoft.com/office/drawing/2010/main" w="9525">
                     <a:solidFill>
                       <a:srgbClr val="000000"/>
                     </a:solidFill>
@@ -10809,7 +10809,7 @@
               </a:ln>
               <a:extLst>
                 <a:ext uri="{91240B29-F687-4f45-9708-019B960494DF}">
-                  <a14:hiddenLine xmlns:a14="http://schemas.microsoft.com/office/drawing/2010/main" xmlns="" w="9525">
+                  <a14:hiddenLine xmlns="" xmlns:a14="http://schemas.microsoft.com/office/drawing/2010/main" w="9525">
                     <a:solidFill>
                       <a:srgbClr val="000000"/>
                     </a:solidFill>
@@ -10899,7 +10899,7 @@
               </a:ln>
               <a:extLst>
                 <a:ext uri="{91240B29-F687-4f45-9708-019B960494DF}">
-                  <a14:hiddenLine xmlns:a14="http://schemas.microsoft.com/office/drawing/2010/main" xmlns="" w="9525">
+                  <a14:hiddenLine xmlns="" xmlns:a14="http://schemas.microsoft.com/office/drawing/2010/main" w="9525">
                     <a:solidFill>
                       <a:srgbClr val="000000"/>
                     </a:solidFill>
@@ -10961,7 +10961,7 @@
               </a:ln>
               <a:extLst>
                 <a:ext uri="{91240B29-F687-4f45-9708-019B960494DF}">
-                  <a14:hiddenLine xmlns:a14="http://schemas.microsoft.com/office/drawing/2010/main" xmlns="" w="9525">
+                  <a14:hiddenLine xmlns="" xmlns:a14="http://schemas.microsoft.com/office/drawing/2010/main" w="9525">
                     <a:solidFill>
                       <a:srgbClr val="000000"/>
                     </a:solidFill>
@@ -11051,7 +11051,7 @@
               </a:ln>
               <a:extLst>
                 <a:ext uri="{91240B29-F687-4f45-9708-019B960494DF}">
-                  <a14:hiddenLine xmlns:a14="http://schemas.microsoft.com/office/drawing/2010/main" xmlns="" w="9525">
+                  <a14:hiddenLine xmlns="" xmlns:a14="http://schemas.microsoft.com/office/drawing/2010/main" w="9525">
                     <a:solidFill>
                       <a:srgbClr val="000000"/>
                     </a:solidFill>
@@ -11116,7 +11116,7 @@
               </a:ln>
               <a:extLst>
                 <a:ext uri="{91240B29-F687-4f45-9708-019B960494DF}">
-                  <a14:hiddenLine xmlns:a14="http://schemas.microsoft.com/office/drawing/2010/main" xmlns="" w="9525">
+                  <a14:hiddenLine xmlns="" xmlns:a14="http://schemas.microsoft.com/office/drawing/2010/main" w="9525">
                     <a:solidFill>
                       <a:srgbClr val="000000"/>
                     </a:solidFill>
@@ -11178,7 +11178,7 @@
               </a:ln>
               <a:extLst>
                 <a:ext uri="{91240B29-F687-4f45-9708-019B960494DF}">
-                  <a14:hiddenLine xmlns:a14="http://schemas.microsoft.com/office/drawing/2010/main" xmlns="" w="9525">
+                  <a14:hiddenLine xmlns="" xmlns:a14="http://schemas.microsoft.com/office/drawing/2010/main" w="9525">
                     <a:solidFill>
                       <a:srgbClr val="000000"/>
                     </a:solidFill>
@@ -11268,7 +11268,7 @@
               </a:ln>
               <a:extLst>
                 <a:ext uri="{91240B29-F687-4f45-9708-019B960494DF}">
-                  <a14:hiddenLine xmlns:a14="http://schemas.microsoft.com/office/drawing/2010/main" xmlns="" w="9525">
+                  <a14:hiddenLine xmlns="" xmlns:a14="http://schemas.microsoft.com/office/drawing/2010/main" w="9525">
                     <a:solidFill>
                       <a:srgbClr val="000000"/>
                     </a:solidFill>
@@ -11358,7 +11358,7 @@
               </a:ln>
               <a:extLst>
                 <a:ext uri="{91240B29-F687-4f45-9708-019B960494DF}">
-                  <a14:hiddenLine xmlns:a14="http://schemas.microsoft.com/office/drawing/2010/main" xmlns="" w="9525">
+                  <a14:hiddenLine xmlns="" xmlns:a14="http://schemas.microsoft.com/office/drawing/2010/main" w="9525">
                     <a:solidFill>
                       <a:srgbClr val="000000"/>
                     </a:solidFill>
@@ -11423,7 +11423,7 @@
               </a:ln>
               <a:extLst>
                 <a:ext uri="{91240B29-F687-4f45-9708-019B960494DF}">
-                  <a14:hiddenLine xmlns:a14="http://schemas.microsoft.com/office/drawing/2010/main" xmlns="" w="9525">
+                  <a14:hiddenLine xmlns="" xmlns:a14="http://schemas.microsoft.com/office/drawing/2010/main" w="9525">
                     <a:solidFill>
                       <a:srgbClr val="000000"/>
                     </a:solidFill>
@@ -11543,7 +11543,7 @@
               </a:ln>
               <a:extLst>
                 <a:ext uri="{91240B29-F687-4f45-9708-019B960494DF}">
-                  <a14:hiddenLine xmlns:a14="http://schemas.microsoft.com/office/drawing/2010/main" xmlns="" w="9525">
+                  <a14:hiddenLine xmlns="" xmlns:a14="http://schemas.microsoft.com/office/drawing/2010/main" w="9525">
                     <a:solidFill>
                       <a:srgbClr val="000000"/>
                     </a:solidFill>
@@ -11624,7 +11624,7 @@
               </a:ln>
               <a:extLst>
                 <a:ext uri="{91240B29-F687-4f45-9708-019B960494DF}">
-                  <a14:hiddenLine xmlns:a14="http://schemas.microsoft.com/office/drawing/2010/main" xmlns="" w="9525">
+                  <a14:hiddenLine xmlns="" xmlns:a14="http://schemas.microsoft.com/office/drawing/2010/main" w="9525">
                     <a:solidFill>
                       <a:srgbClr val="000000"/>
                     </a:solidFill>
@@ -11739,7 +11739,7 @@
               </a:ln>
               <a:extLst>
                 <a:ext uri="{91240B29-F687-4f45-9708-019B960494DF}">
-                  <a14:hiddenLine xmlns:a14="http://schemas.microsoft.com/office/drawing/2010/main" xmlns="" w="9525">
+                  <a14:hiddenLine xmlns="" xmlns:a14="http://schemas.microsoft.com/office/drawing/2010/main" w="9525">
                     <a:solidFill>
                       <a:srgbClr val="000000"/>
                     </a:solidFill>
@@ -11829,7 +11829,7 @@
               </a:ln>
               <a:extLst>
                 <a:ext uri="{91240B29-F687-4f45-9708-019B960494DF}">
-                  <a14:hiddenLine xmlns:a14="http://schemas.microsoft.com/office/drawing/2010/main" xmlns="" w="9525">
+                  <a14:hiddenLine xmlns="" xmlns:a14="http://schemas.microsoft.com/office/drawing/2010/main" w="9525">
                     <a:solidFill>
                       <a:srgbClr val="000000"/>
                     </a:solidFill>
@@ -11894,7 +11894,7 @@
               </a:ln>
               <a:extLst>
                 <a:ext uri="{91240B29-F687-4f45-9708-019B960494DF}">
-                  <a14:hiddenLine xmlns:a14="http://schemas.microsoft.com/office/drawing/2010/main" xmlns="" w="9525">
+                  <a14:hiddenLine xmlns="" xmlns:a14="http://schemas.microsoft.com/office/drawing/2010/main" w="9525">
                     <a:solidFill>
                       <a:srgbClr val="000000"/>
                     </a:solidFill>
@@ -11984,7 +11984,7 @@
               </a:ln>
               <a:extLst>
                 <a:ext uri="{91240B29-F687-4f45-9708-019B960494DF}">
-                  <a14:hiddenLine xmlns:a14="http://schemas.microsoft.com/office/drawing/2010/main" xmlns="" w="9525">
+                  <a14:hiddenLine xmlns="" xmlns:a14="http://schemas.microsoft.com/office/drawing/2010/main" w="9525">
                     <a:solidFill>
                       <a:srgbClr val="000000"/>
                     </a:solidFill>
@@ -12052,7 +12052,7 @@
               </a:ln>
               <a:extLst>
                 <a:ext uri="{91240B29-F687-4f45-9708-019B960494DF}">
-                  <a14:hiddenLine xmlns:a14="http://schemas.microsoft.com/office/drawing/2010/main" xmlns="" w="9525">
+                  <a14:hiddenLine xmlns="" xmlns:a14="http://schemas.microsoft.com/office/drawing/2010/main" w="9525">
                     <a:solidFill>
                       <a:srgbClr val="000000"/>
                     </a:solidFill>
@@ -12142,7 +12142,7 @@
               </a:ln>
               <a:extLst>
                 <a:ext uri="{91240B29-F687-4f45-9708-019B960494DF}">
-                  <a14:hiddenLine xmlns:a14="http://schemas.microsoft.com/office/drawing/2010/main" xmlns="" w="9525">
+                  <a14:hiddenLine xmlns="" xmlns:a14="http://schemas.microsoft.com/office/drawing/2010/main" w="9525">
                     <a:solidFill>
                       <a:srgbClr val="000000"/>
                     </a:solidFill>
@@ -12210,7 +12210,7 @@
               </a:ln>
               <a:extLst>
                 <a:ext uri="{91240B29-F687-4f45-9708-019B960494DF}">
-                  <a14:hiddenLine xmlns:a14="http://schemas.microsoft.com/office/drawing/2010/main" xmlns="" w="9525">
+                  <a14:hiddenLine xmlns="" xmlns:a14="http://schemas.microsoft.com/office/drawing/2010/main" w="9525">
                     <a:solidFill>
                       <a:srgbClr val="000000"/>
                     </a:solidFill>
@@ -12300,7 +12300,7 @@
               </a:ln>
               <a:extLst>
                 <a:ext uri="{91240B29-F687-4f45-9708-019B960494DF}">
-                  <a14:hiddenLine xmlns:a14="http://schemas.microsoft.com/office/drawing/2010/main" xmlns="" w="9525">
+                  <a14:hiddenLine xmlns="" xmlns:a14="http://schemas.microsoft.com/office/drawing/2010/main" w="9525">
                     <a:solidFill>
                       <a:srgbClr val="000000"/>
                     </a:solidFill>
@@ -12334,7 +12334,7 @@
               </a:ln>
               <a:extLst>
                 <a:ext uri="{91240B29-F687-4f45-9708-019B960494DF}">
-                  <a14:hiddenLine xmlns:a14="http://schemas.microsoft.com/office/drawing/2010/main" xmlns="" w="9525">
+                  <a14:hiddenLine xmlns="" xmlns:a14="http://schemas.microsoft.com/office/drawing/2010/main" w="9525">
                     <a:solidFill>
                       <a:srgbClr val="000000"/>
                     </a:solidFill>
@@ -12474,7 +12474,7 @@
           <a:p>
             <a:fld id="{62DA8015-F4DF-264C-B6A2-A0129953FA2D}" type="datetime1">
               <a:rPr lang="en-US" smtClean="0"/>
-              <a:t>10/20/25</a:t>
+              <a:t>10/23/25</a:t>
             </a:fld>
             <a:endParaRPr lang="en-US"/>
           </a:p>
@@ -16562,8 +16562,8 @@
         </p:nvSpPr>
         <p:spPr>
           <a:xfrm>
-            <a:off x="2665534" y="1266037"/>
-            <a:ext cx="6860931" cy="597932"/>
+            <a:off x="2392326" y="1266036"/>
+            <a:ext cx="7370781" cy="949625"/>
           </a:xfrm>
           <a:ln>
             <a:solidFill>
@@ -16588,7 +16588,7 @@
             </a:r>
             <a:r>
               <a:rPr lang="en-US" dirty="0"/>
-              <a:t>: The left has no solution, the right does. Why?</a:t>
+              <a:t>: The left might not have a solution, the right definitely does. Why?</a:t>
             </a:r>
             <a:endParaRPr lang="en-US" i="1" dirty="0"/>
           </a:p>
@@ -23714,7 +23714,7 @@
             </a:pPr>
             <a:r>
               <a:rPr lang="en-US" dirty="0"/>
-              <a:t>…see next slide for example.</a:t>
+              <a:t>…see below for example.</a:t>
             </a:r>
           </a:p>
         </p:txBody>

--- a/slides/04-5-DividingResources.pptx
+++ b/slides/04-5-DividingResources.pptx
@@ -208,7 +208,7 @@
           <a:p>
             <a:fld id="{C5B45307-6ED4-B142-BD64-10F739779302}" type="datetimeFigureOut">
               <a:rPr lang="en-US" smtClean="0"/>
-              <a:t>10/23/25</a:t>
+              <a:t>11/12/25</a:t>
             </a:fld>
             <a:endParaRPr lang="en-US"/>
           </a:p>
@@ -616,7 +616,7 @@
           <a:noFill/>
           <a:extLst>
             <a:ext uri="{909E8E84-426E-40dd-AFC4-6F175D3DCCD1}">
-              <a14:hiddenFill xmlns="" xmlns:a14="http://schemas.microsoft.com/office/drawing/2010/main">
+              <a14:hiddenFill xmlns:a14="http://schemas.microsoft.com/office/drawing/2010/main" xmlns="">
                 <a:solidFill>
                   <a:srgbClr val="FFFFFF"/>
                 </a:solidFill>
@@ -675,7 +675,7 @@
             </a:ln>
             <a:extLst>
               <a:ext uri="{91240B29-F687-4f45-9708-019B960494DF}">
-                <a14:hiddenLine xmlns="" xmlns:a14="http://schemas.microsoft.com/office/drawing/2010/main" w="9525">
+                <a14:hiddenLine xmlns:a14="http://schemas.microsoft.com/office/drawing/2010/main" xmlns="" w="9525">
                   <a:solidFill>
                     <a:srgbClr val="000000"/>
                   </a:solidFill>
@@ -765,7 +765,7 @@
             </a:ln>
             <a:extLst>
               <a:ext uri="{91240B29-F687-4f45-9708-019B960494DF}">
-                <a14:hiddenLine xmlns="" xmlns:a14="http://schemas.microsoft.com/office/drawing/2010/main" w="9525">
+                <a14:hiddenLine xmlns:a14="http://schemas.microsoft.com/office/drawing/2010/main" xmlns="" w="9525">
                   <a:solidFill>
                     <a:srgbClr val="000000"/>
                   </a:solidFill>
@@ -855,7 +855,7 @@
             </a:ln>
             <a:extLst>
               <a:ext uri="{91240B29-F687-4f45-9708-019B960494DF}">
-                <a14:hiddenLine xmlns="" xmlns:a14="http://schemas.microsoft.com/office/drawing/2010/main" w="9525">
+                <a14:hiddenLine xmlns:a14="http://schemas.microsoft.com/office/drawing/2010/main" xmlns="" w="9525">
                   <a:solidFill>
                     <a:srgbClr val="000000"/>
                   </a:solidFill>
@@ -889,7 +889,7 @@
             </a:ln>
             <a:extLst>
               <a:ext uri="{91240B29-F687-4f45-9708-019B960494DF}">
-                <a14:hiddenLine xmlns="" xmlns:a14="http://schemas.microsoft.com/office/drawing/2010/main" w="9525">
+                <a14:hiddenLine xmlns:a14="http://schemas.microsoft.com/office/drawing/2010/main" xmlns="" w="9525">
                   <a:solidFill>
                     <a:srgbClr val="000000"/>
                   </a:solidFill>
@@ -979,7 +979,7 @@
             </a:ln>
             <a:extLst>
               <a:ext uri="{91240B29-F687-4f45-9708-019B960494DF}">
-                <a14:hiddenLine xmlns="" xmlns:a14="http://schemas.microsoft.com/office/drawing/2010/main" w="9525">
+                <a14:hiddenLine xmlns:a14="http://schemas.microsoft.com/office/drawing/2010/main" xmlns="" w="9525">
                   <a:solidFill>
                     <a:srgbClr val="000000"/>
                   </a:solidFill>
@@ -1041,7 +1041,7 @@
             </a:ln>
             <a:extLst>
               <a:ext uri="{91240B29-F687-4f45-9708-019B960494DF}">
-                <a14:hiddenLine xmlns="" xmlns:a14="http://schemas.microsoft.com/office/drawing/2010/main" w="9525">
+                <a14:hiddenLine xmlns:a14="http://schemas.microsoft.com/office/drawing/2010/main" xmlns="" w="9525">
                   <a:solidFill>
                     <a:srgbClr val="000000"/>
                   </a:solidFill>
@@ -1103,7 +1103,7 @@
             </a:ln>
             <a:extLst>
               <a:ext uri="{91240B29-F687-4f45-9708-019B960494DF}">
-                <a14:hiddenLine xmlns="" xmlns:a14="http://schemas.microsoft.com/office/drawing/2010/main" w="9525">
+                <a14:hiddenLine xmlns:a14="http://schemas.microsoft.com/office/drawing/2010/main" xmlns="" w="9525">
                   <a:solidFill>
                     <a:srgbClr val="000000"/>
                   </a:solidFill>
@@ -1193,7 +1193,7 @@
             </a:ln>
             <a:extLst>
               <a:ext uri="{91240B29-F687-4f45-9708-019B960494DF}">
-                <a14:hiddenLine xmlns="" xmlns:a14="http://schemas.microsoft.com/office/drawing/2010/main" w="9525">
+                <a14:hiddenLine xmlns:a14="http://schemas.microsoft.com/office/drawing/2010/main" xmlns="" w="9525">
                   <a:solidFill>
                     <a:srgbClr val="000000"/>
                   </a:solidFill>
@@ -1255,7 +1255,7 @@
             </a:ln>
             <a:extLst>
               <a:ext uri="{91240B29-F687-4f45-9708-019B960494DF}">
-                <a14:hiddenLine xmlns="" xmlns:a14="http://schemas.microsoft.com/office/drawing/2010/main" w="9525">
+                <a14:hiddenLine xmlns:a14="http://schemas.microsoft.com/office/drawing/2010/main" xmlns="" w="9525">
                   <a:solidFill>
                     <a:srgbClr val="000000"/>
                   </a:solidFill>
@@ -1317,7 +1317,7 @@
             </a:ln>
             <a:extLst>
               <a:ext uri="{91240B29-F687-4f45-9708-019B960494DF}">
-                <a14:hiddenLine xmlns="" xmlns:a14="http://schemas.microsoft.com/office/drawing/2010/main" w="9525">
+                <a14:hiddenLine xmlns:a14="http://schemas.microsoft.com/office/drawing/2010/main" xmlns="" w="9525">
                   <a:solidFill>
                     <a:srgbClr val="000000"/>
                   </a:solidFill>
@@ -1407,7 +1407,7 @@
             </a:ln>
             <a:extLst>
               <a:ext uri="{91240B29-F687-4f45-9708-019B960494DF}">
-                <a14:hiddenLine xmlns="" xmlns:a14="http://schemas.microsoft.com/office/drawing/2010/main" w="9525">
+                <a14:hiddenLine xmlns:a14="http://schemas.microsoft.com/office/drawing/2010/main" xmlns="" w="9525">
                   <a:solidFill>
                     <a:srgbClr val="000000"/>
                   </a:solidFill>
@@ -1497,7 +1497,7 @@
             </a:ln>
             <a:extLst>
               <a:ext uri="{91240B29-F687-4f45-9708-019B960494DF}">
-                <a14:hiddenLine xmlns="" xmlns:a14="http://schemas.microsoft.com/office/drawing/2010/main" w="9525">
+                <a14:hiddenLine xmlns:a14="http://schemas.microsoft.com/office/drawing/2010/main" xmlns="" w="9525">
                   <a:solidFill>
                     <a:srgbClr val="000000"/>
                   </a:solidFill>
@@ -1559,7 +1559,7 @@
             </a:ln>
             <a:extLst>
               <a:ext uri="{91240B29-F687-4f45-9708-019B960494DF}">
-                <a14:hiddenLine xmlns="" xmlns:a14="http://schemas.microsoft.com/office/drawing/2010/main" w="9525">
+                <a14:hiddenLine xmlns:a14="http://schemas.microsoft.com/office/drawing/2010/main" xmlns="" w="9525">
                   <a:solidFill>
                     <a:srgbClr val="000000"/>
                   </a:solidFill>
@@ -1669,7 +1669,7 @@
             </a:ln>
             <a:extLst>
               <a:ext uri="{91240B29-F687-4f45-9708-019B960494DF}">
-                <a14:hiddenLine xmlns="" xmlns:a14="http://schemas.microsoft.com/office/drawing/2010/main" w="9525">
+                <a14:hiddenLine xmlns:a14="http://schemas.microsoft.com/office/drawing/2010/main" xmlns="" w="9525">
                   <a:solidFill>
                     <a:srgbClr val="000000"/>
                   </a:solidFill>
@@ -1731,7 +1731,7 @@
             </a:ln>
             <a:extLst>
               <a:ext uri="{91240B29-F687-4f45-9708-019B960494DF}">
-                <a14:hiddenLine xmlns="" xmlns:a14="http://schemas.microsoft.com/office/drawing/2010/main" w="9525">
+                <a14:hiddenLine xmlns:a14="http://schemas.microsoft.com/office/drawing/2010/main" xmlns="" w="9525">
                   <a:solidFill>
                     <a:srgbClr val="000000"/>
                   </a:solidFill>
@@ -1821,7 +1821,7 @@
             </a:ln>
             <a:extLst>
               <a:ext uri="{91240B29-F687-4f45-9708-019B960494DF}">
-                <a14:hiddenLine xmlns="" xmlns:a14="http://schemas.microsoft.com/office/drawing/2010/main" w="9525">
+                <a14:hiddenLine xmlns:a14="http://schemas.microsoft.com/office/drawing/2010/main" xmlns="" w="9525">
                   <a:solidFill>
                     <a:srgbClr val="000000"/>
                   </a:solidFill>
@@ -1911,7 +1911,7 @@
             </a:ln>
             <a:extLst>
               <a:ext uri="{91240B29-F687-4f45-9708-019B960494DF}">
-                <a14:hiddenLine xmlns="" xmlns:a14="http://schemas.microsoft.com/office/drawing/2010/main" w="9525">
+                <a14:hiddenLine xmlns:a14="http://schemas.microsoft.com/office/drawing/2010/main" xmlns="" w="9525">
                   <a:solidFill>
                     <a:srgbClr val="000000"/>
                   </a:solidFill>
@@ -1973,7 +1973,7 @@
             </a:ln>
             <a:extLst>
               <a:ext uri="{91240B29-F687-4f45-9708-019B960494DF}">
-                <a14:hiddenLine xmlns="" xmlns:a14="http://schemas.microsoft.com/office/drawing/2010/main" w="9525">
+                <a14:hiddenLine xmlns:a14="http://schemas.microsoft.com/office/drawing/2010/main" xmlns="" w="9525">
                   <a:solidFill>
                     <a:srgbClr val="000000"/>
                   </a:solidFill>
@@ -2063,7 +2063,7 @@
             </a:ln>
             <a:extLst>
               <a:ext uri="{91240B29-F687-4f45-9708-019B960494DF}">
-                <a14:hiddenLine xmlns="" xmlns:a14="http://schemas.microsoft.com/office/drawing/2010/main" w="9525">
+                <a14:hiddenLine xmlns:a14="http://schemas.microsoft.com/office/drawing/2010/main" xmlns="" w="9525">
                   <a:solidFill>
                     <a:srgbClr val="000000"/>
                   </a:solidFill>
@@ -2153,7 +2153,7 @@
             </a:ln>
             <a:extLst>
               <a:ext uri="{91240B29-F687-4f45-9708-019B960494DF}">
-                <a14:hiddenLine xmlns="" xmlns:a14="http://schemas.microsoft.com/office/drawing/2010/main" w="9525">
+                <a14:hiddenLine xmlns:a14="http://schemas.microsoft.com/office/drawing/2010/main" xmlns="" w="9525">
                   <a:solidFill>
                     <a:srgbClr val="000000"/>
                   </a:solidFill>
@@ -2209,7 +2209,7 @@
             </a:ln>
             <a:extLst>
               <a:ext uri="{91240B29-F687-4f45-9708-019B960494DF}">
-                <a14:hiddenLine xmlns="" xmlns:a14="http://schemas.microsoft.com/office/drawing/2010/main" w="9525">
+                <a14:hiddenLine xmlns:a14="http://schemas.microsoft.com/office/drawing/2010/main" xmlns="" w="9525">
                   <a:solidFill>
                     <a:srgbClr val="000000"/>
                   </a:solidFill>
@@ -2299,7 +2299,7 @@
             </a:ln>
             <a:extLst>
               <a:ext uri="{91240B29-F687-4f45-9708-019B960494DF}">
-                <a14:hiddenLine xmlns="" xmlns:a14="http://schemas.microsoft.com/office/drawing/2010/main" w="9525">
+                <a14:hiddenLine xmlns:a14="http://schemas.microsoft.com/office/drawing/2010/main" xmlns="" w="9525">
                   <a:solidFill>
                     <a:srgbClr val="000000"/>
                   </a:solidFill>
@@ -2355,7 +2355,7 @@
             </a:ln>
             <a:extLst>
               <a:ext uri="{91240B29-F687-4f45-9708-019B960494DF}">
-                <a14:hiddenLine xmlns="" xmlns:a14="http://schemas.microsoft.com/office/drawing/2010/main" w="9525">
+                <a14:hiddenLine xmlns:a14="http://schemas.microsoft.com/office/drawing/2010/main" xmlns="" w="9525">
                   <a:solidFill>
                     <a:srgbClr val="000000"/>
                   </a:solidFill>
@@ -2445,7 +2445,7 @@
             </a:ln>
             <a:extLst>
               <a:ext uri="{91240B29-F687-4f45-9708-019B960494DF}">
-                <a14:hiddenLine xmlns="" xmlns:a14="http://schemas.microsoft.com/office/drawing/2010/main" w="9525">
+                <a14:hiddenLine xmlns:a14="http://schemas.microsoft.com/office/drawing/2010/main" xmlns="" w="9525">
                   <a:solidFill>
                     <a:srgbClr val="000000"/>
                   </a:solidFill>
@@ -2513,7 +2513,7 @@
             </a:ln>
             <a:extLst>
               <a:ext uri="{91240B29-F687-4f45-9708-019B960494DF}">
-                <a14:hiddenLine xmlns="" xmlns:a14="http://schemas.microsoft.com/office/drawing/2010/main" w="9525">
+                <a14:hiddenLine xmlns:a14="http://schemas.microsoft.com/office/drawing/2010/main" xmlns="" w="9525">
                   <a:solidFill>
                     <a:srgbClr val="000000"/>
                   </a:solidFill>
@@ -2603,7 +2603,7 @@
             </a:ln>
             <a:extLst>
               <a:ext uri="{91240B29-F687-4f45-9708-019B960494DF}">
-                <a14:hiddenLine xmlns="" xmlns:a14="http://schemas.microsoft.com/office/drawing/2010/main" w="9525">
+                <a14:hiddenLine xmlns:a14="http://schemas.microsoft.com/office/drawing/2010/main" xmlns="" w="9525">
                   <a:solidFill>
                     <a:srgbClr val="000000"/>
                   </a:solidFill>
@@ -2671,7 +2671,7 @@
             </a:ln>
             <a:extLst>
               <a:ext uri="{91240B29-F687-4f45-9708-019B960494DF}">
-                <a14:hiddenLine xmlns="" xmlns:a14="http://schemas.microsoft.com/office/drawing/2010/main" w="9525">
+                <a14:hiddenLine xmlns:a14="http://schemas.microsoft.com/office/drawing/2010/main" xmlns="" w="9525">
                   <a:solidFill>
                     <a:srgbClr val="000000"/>
                   </a:solidFill>
@@ -2761,7 +2761,7 @@
             </a:ln>
             <a:extLst>
               <a:ext uri="{91240B29-F687-4f45-9708-019B960494DF}">
-                <a14:hiddenLine xmlns="" xmlns:a14="http://schemas.microsoft.com/office/drawing/2010/main" w="9525">
+                <a14:hiddenLine xmlns:a14="http://schemas.microsoft.com/office/drawing/2010/main" xmlns="" w="9525">
                   <a:solidFill>
                     <a:srgbClr val="000000"/>
                   </a:solidFill>
@@ -2795,7 +2795,7 @@
             </a:ln>
             <a:extLst>
               <a:ext uri="{91240B29-F687-4f45-9708-019B960494DF}">
-                <a14:hiddenLine xmlns="" xmlns:a14="http://schemas.microsoft.com/office/drawing/2010/main" w="9525">
+                <a14:hiddenLine xmlns:a14="http://schemas.microsoft.com/office/drawing/2010/main" xmlns="" w="9525">
                   <a:solidFill>
                     <a:srgbClr val="000000"/>
                   </a:solidFill>
@@ -2885,7 +2885,7 @@
             </a:ln>
             <a:extLst>
               <a:ext uri="{91240B29-F687-4f45-9708-019B960494DF}">
-                <a14:hiddenLine xmlns="" xmlns:a14="http://schemas.microsoft.com/office/drawing/2010/main" w="9525">
+                <a14:hiddenLine xmlns:a14="http://schemas.microsoft.com/office/drawing/2010/main" xmlns="" w="9525">
                   <a:solidFill>
                     <a:srgbClr val="000000"/>
                   </a:solidFill>
@@ -2947,7 +2947,7 @@
             </a:ln>
             <a:extLst>
               <a:ext uri="{91240B29-F687-4f45-9708-019B960494DF}">
-                <a14:hiddenLine xmlns="" xmlns:a14="http://schemas.microsoft.com/office/drawing/2010/main" w="9525">
+                <a14:hiddenLine xmlns:a14="http://schemas.microsoft.com/office/drawing/2010/main" xmlns="" w="9525">
                   <a:solidFill>
                     <a:srgbClr val="000000"/>
                   </a:solidFill>
@@ -3009,7 +3009,7 @@
             </a:ln>
             <a:extLst>
               <a:ext uri="{91240B29-F687-4f45-9708-019B960494DF}">
-                <a14:hiddenLine xmlns="" xmlns:a14="http://schemas.microsoft.com/office/drawing/2010/main" w="9525">
+                <a14:hiddenLine xmlns:a14="http://schemas.microsoft.com/office/drawing/2010/main" xmlns="" w="9525">
                   <a:solidFill>
                     <a:srgbClr val="000000"/>
                   </a:solidFill>
@@ -3099,7 +3099,7 @@
             </a:ln>
             <a:extLst>
               <a:ext uri="{91240B29-F687-4f45-9708-019B960494DF}">
-                <a14:hiddenLine xmlns="" xmlns:a14="http://schemas.microsoft.com/office/drawing/2010/main" w="9525">
+                <a14:hiddenLine xmlns:a14="http://schemas.microsoft.com/office/drawing/2010/main" xmlns="" w="9525">
                   <a:solidFill>
                     <a:srgbClr val="000000"/>
                   </a:solidFill>
@@ -3167,7 +3167,7 @@
             </a:ln>
             <a:extLst>
               <a:ext uri="{91240B29-F687-4f45-9708-019B960494DF}">
-                <a14:hiddenLine xmlns="" xmlns:a14="http://schemas.microsoft.com/office/drawing/2010/main" w="9525">
+                <a14:hiddenLine xmlns:a14="http://schemas.microsoft.com/office/drawing/2010/main" xmlns="" w="9525">
                   <a:solidFill>
                     <a:srgbClr val="000000"/>
                   </a:solidFill>
@@ -3229,7 +3229,7 @@
             </a:ln>
             <a:extLst>
               <a:ext uri="{91240B29-F687-4f45-9708-019B960494DF}">
-                <a14:hiddenLine xmlns="" xmlns:a14="http://schemas.microsoft.com/office/drawing/2010/main" w="9525">
+                <a14:hiddenLine xmlns:a14="http://schemas.microsoft.com/office/drawing/2010/main" xmlns="" w="9525">
                   <a:solidFill>
                     <a:srgbClr val="000000"/>
                   </a:solidFill>
@@ -3319,7 +3319,7 @@
             </a:ln>
             <a:extLst>
               <a:ext uri="{91240B29-F687-4f45-9708-019B960494DF}">
-                <a14:hiddenLine xmlns="" xmlns:a14="http://schemas.microsoft.com/office/drawing/2010/main" w="9525">
+                <a14:hiddenLine xmlns:a14="http://schemas.microsoft.com/office/drawing/2010/main" xmlns="" w="9525">
                   <a:solidFill>
                     <a:srgbClr val="000000"/>
                   </a:solidFill>
@@ -3381,7 +3381,7 @@
             </a:ln>
             <a:extLst>
               <a:ext uri="{91240B29-F687-4f45-9708-019B960494DF}">
-                <a14:hiddenLine xmlns="" xmlns:a14="http://schemas.microsoft.com/office/drawing/2010/main" w="9525">
+                <a14:hiddenLine xmlns:a14="http://schemas.microsoft.com/office/drawing/2010/main" xmlns="" w="9525">
                   <a:solidFill>
                     <a:srgbClr val="000000"/>
                   </a:solidFill>
@@ -3471,7 +3471,7 @@
             </a:ln>
             <a:extLst>
               <a:ext uri="{91240B29-F687-4f45-9708-019B960494DF}">
-                <a14:hiddenLine xmlns="" xmlns:a14="http://schemas.microsoft.com/office/drawing/2010/main" w="9525">
+                <a14:hiddenLine xmlns:a14="http://schemas.microsoft.com/office/drawing/2010/main" xmlns="" w="9525">
                   <a:solidFill>
                     <a:srgbClr val="000000"/>
                   </a:solidFill>
@@ -3533,7 +3533,7 @@
             </a:ln>
             <a:extLst>
               <a:ext uri="{91240B29-F687-4f45-9708-019B960494DF}">
-                <a14:hiddenLine xmlns="" xmlns:a14="http://schemas.microsoft.com/office/drawing/2010/main" w="9525">
+                <a14:hiddenLine xmlns:a14="http://schemas.microsoft.com/office/drawing/2010/main" xmlns="" w="9525">
                   <a:solidFill>
                     <a:srgbClr val="000000"/>
                   </a:solidFill>
@@ -3623,7 +3623,7 @@
             </a:ln>
             <a:extLst>
               <a:ext uri="{91240B29-F687-4f45-9708-019B960494DF}">
-                <a14:hiddenLine xmlns="" xmlns:a14="http://schemas.microsoft.com/office/drawing/2010/main" w="9525">
+                <a14:hiddenLine xmlns:a14="http://schemas.microsoft.com/office/drawing/2010/main" xmlns="" w="9525">
                   <a:solidFill>
                     <a:srgbClr val="000000"/>
                   </a:solidFill>
@@ -3657,7 +3657,7 @@
             </a:ln>
             <a:extLst>
               <a:ext uri="{91240B29-F687-4f45-9708-019B960494DF}">
-                <a14:hiddenLine xmlns="" xmlns:a14="http://schemas.microsoft.com/office/drawing/2010/main" w="9525">
+                <a14:hiddenLine xmlns:a14="http://schemas.microsoft.com/office/drawing/2010/main" xmlns="" w="9525">
                   <a:solidFill>
                     <a:srgbClr val="000000"/>
                   </a:solidFill>
@@ -3722,7 +3722,7 @@
             </a:ln>
             <a:extLst>
               <a:ext uri="{91240B29-F687-4f45-9708-019B960494DF}">
-                <a14:hiddenLine xmlns="" xmlns:a14="http://schemas.microsoft.com/office/drawing/2010/main" w="9525">
+                <a14:hiddenLine xmlns:a14="http://schemas.microsoft.com/office/drawing/2010/main" xmlns="" w="9525">
                   <a:solidFill>
                     <a:srgbClr val="000000"/>
                   </a:solidFill>
@@ -3812,7 +3812,7 @@
             </a:ln>
             <a:extLst>
               <a:ext uri="{91240B29-F687-4f45-9708-019B960494DF}">
-                <a14:hiddenLine xmlns="" xmlns:a14="http://schemas.microsoft.com/office/drawing/2010/main" w="9525">
+                <a14:hiddenLine xmlns:a14="http://schemas.microsoft.com/office/drawing/2010/main" xmlns="" w="9525">
                   <a:solidFill>
                     <a:srgbClr val="000000"/>
                   </a:solidFill>
@@ -3874,7 +3874,7 @@
             </a:ln>
             <a:extLst>
               <a:ext uri="{91240B29-F687-4f45-9708-019B960494DF}">
-                <a14:hiddenLine xmlns="" xmlns:a14="http://schemas.microsoft.com/office/drawing/2010/main" w="9525">
+                <a14:hiddenLine xmlns:a14="http://schemas.microsoft.com/office/drawing/2010/main" xmlns="" w="9525">
                   <a:solidFill>
                     <a:srgbClr val="000000"/>
                   </a:solidFill>
@@ -3964,7 +3964,7 @@
             </a:ln>
             <a:extLst>
               <a:ext uri="{91240B29-F687-4f45-9708-019B960494DF}">
-                <a14:hiddenLine xmlns="" xmlns:a14="http://schemas.microsoft.com/office/drawing/2010/main" w="9525">
+                <a14:hiddenLine xmlns:a14="http://schemas.microsoft.com/office/drawing/2010/main" xmlns="" w="9525">
                   <a:solidFill>
                     <a:srgbClr val="000000"/>
                   </a:solidFill>
@@ -4054,7 +4054,7 @@
             </a:ln>
             <a:extLst>
               <a:ext uri="{91240B29-F687-4f45-9708-019B960494DF}">
-                <a14:hiddenLine xmlns="" xmlns:a14="http://schemas.microsoft.com/office/drawing/2010/main" w="9525">
+                <a14:hiddenLine xmlns:a14="http://schemas.microsoft.com/office/drawing/2010/main" xmlns="" w="9525">
                   <a:solidFill>
                     <a:srgbClr val="000000"/>
                   </a:solidFill>
@@ -4119,7 +4119,7 @@
             </a:ln>
             <a:extLst>
               <a:ext uri="{91240B29-F687-4f45-9708-019B960494DF}">
-                <a14:hiddenLine xmlns="" xmlns:a14="http://schemas.microsoft.com/office/drawing/2010/main" w="9525">
+                <a14:hiddenLine xmlns:a14="http://schemas.microsoft.com/office/drawing/2010/main" xmlns="" w="9525">
                   <a:solidFill>
                     <a:srgbClr val="000000"/>
                   </a:solidFill>
@@ -4181,7 +4181,7 @@
             </a:ln>
             <a:extLst>
               <a:ext uri="{91240B29-F687-4f45-9708-019B960494DF}">
-                <a14:hiddenLine xmlns="" xmlns:a14="http://schemas.microsoft.com/office/drawing/2010/main" w="9525">
+                <a14:hiddenLine xmlns:a14="http://schemas.microsoft.com/office/drawing/2010/main" xmlns="" w="9525">
                   <a:solidFill>
                     <a:srgbClr val="000000"/>
                   </a:solidFill>
@@ -4271,7 +4271,7 @@
             </a:ln>
             <a:extLst>
               <a:ext uri="{91240B29-F687-4f45-9708-019B960494DF}">
-                <a14:hiddenLine xmlns="" xmlns:a14="http://schemas.microsoft.com/office/drawing/2010/main" w="9525">
+                <a14:hiddenLine xmlns:a14="http://schemas.microsoft.com/office/drawing/2010/main" xmlns="" w="9525">
                   <a:solidFill>
                     <a:srgbClr val="000000"/>
                   </a:solidFill>
@@ -4361,7 +4361,7 @@
             </a:ln>
             <a:extLst>
               <a:ext uri="{91240B29-F687-4f45-9708-019B960494DF}">
-                <a14:hiddenLine xmlns="" xmlns:a14="http://schemas.microsoft.com/office/drawing/2010/main" w="9525">
+                <a14:hiddenLine xmlns:a14="http://schemas.microsoft.com/office/drawing/2010/main" xmlns="" w="9525">
                   <a:solidFill>
                     <a:srgbClr val="000000"/>
                   </a:solidFill>
@@ -4423,7 +4423,7 @@
             </a:ln>
             <a:extLst>
               <a:ext uri="{91240B29-F687-4f45-9708-019B960494DF}">
-                <a14:hiddenLine xmlns="" xmlns:a14="http://schemas.microsoft.com/office/drawing/2010/main" w="9525">
+                <a14:hiddenLine xmlns:a14="http://schemas.microsoft.com/office/drawing/2010/main" xmlns="" w="9525">
                   <a:solidFill>
                     <a:srgbClr val="000000"/>
                   </a:solidFill>
@@ -4543,7 +4543,7 @@
             </a:ln>
             <a:extLst>
               <a:ext uri="{91240B29-F687-4f45-9708-019B960494DF}">
-                <a14:hiddenLine xmlns="" xmlns:a14="http://schemas.microsoft.com/office/drawing/2010/main" w="9525">
+                <a14:hiddenLine xmlns:a14="http://schemas.microsoft.com/office/drawing/2010/main" xmlns="" w="9525">
                   <a:solidFill>
                     <a:srgbClr val="000000"/>
                   </a:solidFill>
@@ -4611,7 +4611,7 @@
             </a:ln>
             <a:extLst>
               <a:ext uri="{91240B29-F687-4f45-9708-019B960494DF}">
-                <a14:hiddenLine xmlns="" xmlns:a14="http://schemas.microsoft.com/office/drawing/2010/main" w="9525">
+                <a14:hiddenLine xmlns:a14="http://schemas.microsoft.com/office/drawing/2010/main" xmlns="" w="9525">
                   <a:solidFill>
                     <a:srgbClr val="000000"/>
                   </a:solidFill>
@@ -4701,7 +4701,7 @@
             </a:ln>
             <a:extLst>
               <a:ext uri="{91240B29-F687-4f45-9708-019B960494DF}">
-                <a14:hiddenLine xmlns="" xmlns:a14="http://schemas.microsoft.com/office/drawing/2010/main" w="9525">
+                <a14:hiddenLine xmlns:a14="http://schemas.microsoft.com/office/drawing/2010/main" xmlns="" w="9525">
                   <a:solidFill>
                     <a:srgbClr val="000000"/>
                   </a:solidFill>
@@ -4841,7 +4841,7 @@
           <a:p>
             <a:fld id="{02CD26A6-15A2-B449-9218-85BDE57EBA42}" type="datetime1">
               <a:rPr lang="en-US" smtClean="0"/>
-              <a:t>10/23/25</a:t>
+              <a:t>11/12/25</a:t>
             </a:fld>
             <a:endParaRPr lang="en-US"/>
           </a:p>
@@ -5108,7 +5108,7 @@
           <a:p>
             <a:fld id="{86196231-FA13-E844-B7A9-39406EF14982}" type="datetime1">
               <a:rPr lang="en-US" smtClean="0"/>
-              <a:t>10/23/25</a:t>
+              <a:t>11/12/25</a:t>
             </a:fld>
             <a:endParaRPr lang="en-US"/>
           </a:p>
@@ -5304,7 +5304,7 @@
           <a:p>
             <a:fld id="{F8A175EF-9ECA-B54E-B5F1-E9A7ECD1A9A7}" type="datetime1">
               <a:rPr lang="en-US" smtClean="0"/>
-              <a:t>10/23/25</a:t>
+              <a:t>11/12/25</a:t>
             </a:fld>
             <a:endParaRPr lang="en-US"/>
           </a:p>
@@ -5567,7 +5567,7 @@
           <a:p>
             <a:fld id="{500354CC-C6D3-2343-B23F-7899CBC1D23F}" type="datetime1">
               <a:rPr lang="en-US" smtClean="0"/>
-              <a:t>10/23/25</a:t>
+              <a:t>11/12/25</a:t>
             </a:fld>
             <a:endParaRPr lang="en-US"/>
           </a:p>
@@ -6001,7 +6001,7 @@
           <a:p>
             <a:fld id="{91A73A3F-0738-3A4B-9460-155F524D47D2}" type="datetime1">
               <a:rPr lang="en-US" smtClean="0"/>
-              <a:t>10/23/25</a:t>
+              <a:t>11/12/25</a:t>
             </a:fld>
             <a:endParaRPr lang="en-US"/>
           </a:p>
@@ -6547,7 +6547,7 @@
           <a:p>
             <a:fld id="{7377266C-1F81-3F4F-9E28-AFBFE5E15350}" type="datetime1">
               <a:rPr lang="en-US" smtClean="0"/>
-              <a:t>10/23/25</a:t>
+              <a:t>11/12/25</a:t>
             </a:fld>
             <a:endParaRPr lang="en-US"/>
           </a:p>
@@ -7267,7 +7267,7 @@
           <a:p>
             <a:fld id="{9025C51A-5B64-744E-84CD-F53E0FA92537}" type="datetime1">
               <a:rPr lang="en-US" smtClean="0"/>
-              <a:t>10/23/25</a:t>
+              <a:t>11/12/25</a:t>
             </a:fld>
             <a:endParaRPr lang="en-US"/>
           </a:p>
@@ -7437,7 +7437,7 @@
           <a:p>
             <a:fld id="{4DCA85F3-FE26-6F4E-A395-CAB36C7DE96B}" type="datetime1">
               <a:rPr lang="en-US" smtClean="0"/>
-              <a:t>10/23/25</a:t>
+              <a:t>11/12/25</a:t>
             </a:fld>
             <a:endParaRPr lang="en-US"/>
           </a:p>
@@ -7617,7 +7617,7 @@
           <a:p>
             <a:fld id="{93668D8C-2310-1F49-8704-ED0A872C1D76}" type="datetime1">
               <a:rPr lang="en-US" smtClean="0"/>
-              <a:t>10/23/25</a:t>
+              <a:t>11/12/25</a:t>
             </a:fld>
             <a:endParaRPr lang="en-US"/>
           </a:p>
@@ -7787,7 +7787,7 @@
           <a:p>
             <a:fld id="{1AE8176D-7614-0047-BF7D-0D7213955B60}" type="datetime1">
               <a:rPr lang="en-US" smtClean="0"/>
-              <a:t>10/23/25</a:t>
+              <a:t>11/12/25</a:t>
             </a:fld>
             <a:endParaRPr lang="en-US"/>
           </a:p>
@@ -8037,7 +8037,7 @@
           <a:p>
             <a:fld id="{BBD3DFC6-3AF6-5F40-9115-61971812DEC9}" type="datetime1">
               <a:rPr lang="en-US" smtClean="0"/>
-              <a:t>10/23/25</a:t>
+              <a:t>11/12/25</a:t>
             </a:fld>
             <a:endParaRPr lang="en-US"/>
           </a:p>
@@ -8269,7 +8269,7 @@
           <a:p>
             <a:fld id="{B9ED4E90-35C8-E14C-B1F1-9C55AFA0B23D}" type="datetime1">
               <a:rPr lang="en-US" smtClean="0"/>
-              <a:t>10/23/25</a:t>
+              <a:t>11/12/25</a:t>
             </a:fld>
             <a:endParaRPr lang="en-US"/>
           </a:p>
@@ -8655,7 +8655,7 @@
           <a:p>
             <a:fld id="{E46EEFC5-06EE-864E-8985-D4A3572367C6}" type="datetime1">
               <a:rPr lang="en-US" smtClean="0"/>
-              <a:t>10/23/25</a:t>
+              <a:t>11/12/25</a:t>
             </a:fld>
             <a:endParaRPr lang="en-US"/>
           </a:p>
@@ -8778,7 +8778,7 @@
           <a:p>
             <a:fld id="{8AFAEA8D-371E-E449-A3CD-D4BC4ACAE00B}" type="datetime1">
               <a:rPr lang="en-US" smtClean="0"/>
-              <a:t>10/23/25</a:t>
+              <a:t>11/12/25</a:t>
             </a:fld>
             <a:endParaRPr lang="en-US"/>
           </a:p>
@@ -8873,7 +8873,7 @@
           <a:p>
             <a:fld id="{995DCDE8-2B30-9C4B-9524-B7B866851B77}" type="datetime1">
               <a:rPr lang="en-US" smtClean="0"/>
-              <a:t>10/23/25</a:t>
+              <a:t>11/12/25</a:t>
             </a:fld>
             <a:endParaRPr lang="en-US"/>
           </a:p>
@@ -9122,7 +9122,7 @@
           <a:p>
             <a:fld id="{29D79D64-9F73-834A-BB33-5400411F3A00}" type="datetime1">
               <a:rPr lang="en-US" smtClean="0"/>
-              <a:t>10/23/25</a:t>
+              <a:t>11/12/25</a:t>
             </a:fld>
             <a:endParaRPr lang="en-US"/>
           </a:p>
@@ -9407,7 +9407,7 @@
           <a:p>
             <a:fld id="{9A1452D3-087A-BD44-B9C8-6816C7755A34}" type="datetime1">
               <a:rPr lang="en-US" smtClean="0"/>
-              <a:t>10/23/25</a:t>
+              <a:t>11/12/25</a:t>
             </a:fld>
             <a:endParaRPr lang="en-US"/>
           </a:p>
@@ -9530,7 +9530,7 @@
           <a:noFill/>
           <a:extLst>
             <a:ext uri="{909E8E84-426E-40dd-AFC4-6F175D3DCCD1}">
-              <a14:hiddenFill xmlns="" xmlns:a14="http://schemas.microsoft.com/office/drawing/2010/main">
+              <a14:hiddenFill xmlns:a14="http://schemas.microsoft.com/office/drawing/2010/main" xmlns="">
                 <a:solidFill>
                   <a:srgbClr val="FFFFFF"/>
                 </a:solidFill>
@@ -9604,7 +9604,7 @@
               </a:ln>
               <a:extLst>
                 <a:ext uri="{91240B29-F687-4f45-9708-019B960494DF}">
-                  <a14:hiddenLine xmlns="" xmlns:a14="http://schemas.microsoft.com/office/drawing/2010/main" w="9525">
+                  <a14:hiddenLine xmlns:a14="http://schemas.microsoft.com/office/drawing/2010/main" xmlns="" w="9525">
                     <a:solidFill>
                       <a:srgbClr val="000000"/>
                     </a:solidFill>
@@ -9694,7 +9694,7 @@
               </a:ln>
               <a:extLst>
                 <a:ext uri="{91240B29-F687-4f45-9708-019B960494DF}">
-                  <a14:hiddenLine xmlns="" xmlns:a14="http://schemas.microsoft.com/office/drawing/2010/main" w="9525">
+                  <a14:hiddenLine xmlns:a14="http://schemas.microsoft.com/office/drawing/2010/main" xmlns="" w="9525">
                     <a:solidFill>
                       <a:srgbClr val="000000"/>
                     </a:solidFill>
@@ -9784,7 +9784,7 @@
               </a:ln>
               <a:extLst>
                 <a:ext uri="{91240B29-F687-4f45-9708-019B960494DF}">
-                  <a14:hiddenLine xmlns="" xmlns:a14="http://schemas.microsoft.com/office/drawing/2010/main" w="9525">
+                  <a14:hiddenLine xmlns:a14="http://schemas.microsoft.com/office/drawing/2010/main" xmlns="" w="9525">
                     <a:solidFill>
                       <a:srgbClr val="000000"/>
                     </a:solidFill>
@@ -9846,7 +9846,7 @@
               </a:ln>
               <a:extLst>
                 <a:ext uri="{91240B29-F687-4f45-9708-019B960494DF}">
-                  <a14:hiddenLine xmlns="" xmlns:a14="http://schemas.microsoft.com/office/drawing/2010/main" w="9525">
+                  <a14:hiddenLine xmlns:a14="http://schemas.microsoft.com/office/drawing/2010/main" xmlns="" w="9525">
                     <a:solidFill>
                       <a:srgbClr val="000000"/>
                     </a:solidFill>
@@ -9936,7 +9936,7 @@
               </a:ln>
               <a:extLst>
                 <a:ext uri="{91240B29-F687-4f45-9708-019B960494DF}">
-                  <a14:hiddenLine xmlns="" xmlns:a14="http://schemas.microsoft.com/office/drawing/2010/main" w="9525">
+                  <a14:hiddenLine xmlns:a14="http://schemas.microsoft.com/office/drawing/2010/main" xmlns="" w="9525">
                     <a:solidFill>
                       <a:srgbClr val="000000"/>
                     </a:solidFill>
@@ -9998,7 +9998,7 @@
               </a:ln>
               <a:extLst>
                 <a:ext uri="{91240B29-F687-4f45-9708-019B960494DF}">
-                  <a14:hiddenLine xmlns="" xmlns:a14="http://schemas.microsoft.com/office/drawing/2010/main" w="9525">
+                  <a14:hiddenLine xmlns:a14="http://schemas.microsoft.com/office/drawing/2010/main" xmlns="" w="9525">
                     <a:solidFill>
                       <a:srgbClr val="000000"/>
                     </a:solidFill>
@@ -10060,7 +10060,7 @@
               </a:ln>
               <a:extLst>
                 <a:ext uri="{91240B29-F687-4f45-9708-019B960494DF}">
-                  <a14:hiddenLine xmlns="" xmlns:a14="http://schemas.microsoft.com/office/drawing/2010/main" w="9525">
+                  <a14:hiddenLine xmlns:a14="http://schemas.microsoft.com/office/drawing/2010/main" xmlns="" w="9525">
                     <a:solidFill>
                       <a:srgbClr val="000000"/>
                     </a:solidFill>
@@ -10150,7 +10150,7 @@
               </a:ln>
               <a:extLst>
                 <a:ext uri="{91240B29-F687-4f45-9708-019B960494DF}">
-                  <a14:hiddenLine xmlns="" xmlns:a14="http://schemas.microsoft.com/office/drawing/2010/main" w="9525">
+                  <a14:hiddenLine xmlns:a14="http://schemas.microsoft.com/office/drawing/2010/main" xmlns="" w="9525">
                     <a:solidFill>
                       <a:srgbClr val="000000"/>
                     </a:solidFill>
@@ -10240,7 +10240,7 @@
               </a:ln>
               <a:extLst>
                 <a:ext uri="{91240B29-F687-4f45-9708-019B960494DF}">
-                  <a14:hiddenLine xmlns="" xmlns:a14="http://schemas.microsoft.com/office/drawing/2010/main" w="9525">
+                  <a14:hiddenLine xmlns:a14="http://schemas.microsoft.com/office/drawing/2010/main" xmlns="" w="9525">
                     <a:solidFill>
                       <a:srgbClr val="000000"/>
                     </a:solidFill>
@@ -10302,7 +10302,7 @@
               </a:ln>
               <a:extLst>
                 <a:ext uri="{91240B29-F687-4f45-9708-019B960494DF}">
-                  <a14:hiddenLine xmlns="" xmlns:a14="http://schemas.microsoft.com/office/drawing/2010/main" w="9525">
+                  <a14:hiddenLine xmlns:a14="http://schemas.microsoft.com/office/drawing/2010/main" xmlns="" w="9525">
                     <a:solidFill>
                       <a:srgbClr val="000000"/>
                     </a:solidFill>
@@ -10412,7 +10412,7 @@
               </a:ln>
               <a:extLst>
                 <a:ext uri="{91240B29-F687-4f45-9708-019B960494DF}">
-                  <a14:hiddenLine xmlns="" xmlns:a14="http://schemas.microsoft.com/office/drawing/2010/main" w="9525">
+                  <a14:hiddenLine xmlns:a14="http://schemas.microsoft.com/office/drawing/2010/main" xmlns="" w="9525">
                     <a:solidFill>
                       <a:srgbClr val="000000"/>
                     </a:solidFill>
@@ -10496,7 +10496,7 @@
               </a:ln>
               <a:extLst>
                 <a:ext uri="{91240B29-F687-4f45-9708-019B960494DF}">
-                  <a14:hiddenLine xmlns="" xmlns:a14="http://schemas.microsoft.com/office/drawing/2010/main" w="9525">
+                  <a14:hiddenLine xmlns:a14="http://schemas.microsoft.com/office/drawing/2010/main" xmlns="" w="9525">
                     <a:solidFill>
                       <a:srgbClr val="000000"/>
                     </a:solidFill>
@@ -10558,7 +10558,7 @@
               </a:ln>
               <a:extLst>
                 <a:ext uri="{91240B29-F687-4f45-9708-019B960494DF}">
-                  <a14:hiddenLine xmlns="" xmlns:a14="http://schemas.microsoft.com/office/drawing/2010/main" w="9525">
+                  <a14:hiddenLine xmlns:a14="http://schemas.microsoft.com/office/drawing/2010/main" xmlns="" w="9525">
                     <a:solidFill>
                       <a:srgbClr val="000000"/>
                     </a:solidFill>
@@ -10620,7 +10620,7 @@
               </a:ln>
               <a:extLst>
                 <a:ext uri="{91240B29-F687-4f45-9708-019B960494DF}">
-                  <a14:hiddenLine xmlns="" xmlns:a14="http://schemas.microsoft.com/office/drawing/2010/main" w="9525">
+                  <a14:hiddenLine xmlns:a14="http://schemas.microsoft.com/office/drawing/2010/main" xmlns="" w="9525">
                     <a:solidFill>
                       <a:srgbClr val="000000"/>
                     </a:solidFill>
@@ -10710,7 +10710,7 @@
               </a:ln>
               <a:extLst>
                 <a:ext uri="{91240B29-F687-4f45-9708-019B960494DF}">
-                  <a14:hiddenLine xmlns="" xmlns:a14="http://schemas.microsoft.com/office/drawing/2010/main" w="9525">
+                  <a14:hiddenLine xmlns:a14="http://schemas.microsoft.com/office/drawing/2010/main" xmlns="" w="9525">
                     <a:solidFill>
                       <a:srgbClr val="000000"/>
                     </a:solidFill>
@@ -10744,7 +10744,7 @@
               </a:ln>
               <a:extLst>
                 <a:ext uri="{91240B29-F687-4f45-9708-019B960494DF}">
-                  <a14:hiddenLine xmlns="" xmlns:a14="http://schemas.microsoft.com/office/drawing/2010/main" w="9525">
+                  <a14:hiddenLine xmlns:a14="http://schemas.microsoft.com/office/drawing/2010/main" xmlns="" w="9525">
                     <a:solidFill>
                       <a:srgbClr val="000000"/>
                     </a:solidFill>
@@ -10809,7 +10809,7 @@
               </a:ln>
               <a:extLst>
                 <a:ext uri="{91240B29-F687-4f45-9708-019B960494DF}">
-                  <a14:hiddenLine xmlns="" xmlns:a14="http://schemas.microsoft.com/office/drawing/2010/main" w="9525">
+                  <a14:hiddenLine xmlns:a14="http://schemas.microsoft.com/office/drawing/2010/main" xmlns="" w="9525">
                     <a:solidFill>
                       <a:srgbClr val="000000"/>
                     </a:solidFill>
@@ -10899,7 +10899,7 @@
               </a:ln>
               <a:extLst>
                 <a:ext uri="{91240B29-F687-4f45-9708-019B960494DF}">
-                  <a14:hiddenLine xmlns="" xmlns:a14="http://schemas.microsoft.com/office/drawing/2010/main" w="9525">
+                  <a14:hiddenLine xmlns:a14="http://schemas.microsoft.com/office/drawing/2010/main" xmlns="" w="9525">
                     <a:solidFill>
                       <a:srgbClr val="000000"/>
                     </a:solidFill>
@@ -10961,7 +10961,7 @@
               </a:ln>
               <a:extLst>
                 <a:ext uri="{91240B29-F687-4f45-9708-019B960494DF}">
-                  <a14:hiddenLine xmlns="" xmlns:a14="http://schemas.microsoft.com/office/drawing/2010/main" w="9525">
+                  <a14:hiddenLine xmlns:a14="http://schemas.microsoft.com/office/drawing/2010/main" xmlns="" w="9525">
                     <a:solidFill>
                       <a:srgbClr val="000000"/>
                     </a:solidFill>
@@ -11051,7 +11051,7 @@
               </a:ln>
               <a:extLst>
                 <a:ext uri="{91240B29-F687-4f45-9708-019B960494DF}">
-                  <a14:hiddenLine xmlns="" xmlns:a14="http://schemas.microsoft.com/office/drawing/2010/main" w="9525">
+                  <a14:hiddenLine xmlns:a14="http://schemas.microsoft.com/office/drawing/2010/main" xmlns="" w="9525">
                     <a:solidFill>
                       <a:srgbClr val="000000"/>
                     </a:solidFill>
@@ -11116,7 +11116,7 @@
               </a:ln>
               <a:extLst>
                 <a:ext uri="{91240B29-F687-4f45-9708-019B960494DF}">
-                  <a14:hiddenLine xmlns="" xmlns:a14="http://schemas.microsoft.com/office/drawing/2010/main" w="9525">
+                  <a14:hiddenLine xmlns:a14="http://schemas.microsoft.com/office/drawing/2010/main" xmlns="" w="9525">
                     <a:solidFill>
                       <a:srgbClr val="000000"/>
                     </a:solidFill>
@@ -11178,7 +11178,7 @@
               </a:ln>
               <a:extLst>
                 <a:ext uri="{91240B29-F687-4f45-9708-019B960494DF}">
-                  <a14:hiddenLine xmlns="" xmlns:a14="http://schemas.microsoft.com/office/drawing/2010/main" w="9525">
+                  <a14:hiddenLine xmlns:a14="http://schemas.microsoft.com/office/drawing/2010/main" xmlns="" w="9525">
                     <a:solidFill>
                       <a:srgbClr val="000000"/>
                     </a:solidFill>
@@ -11268,7 +11268,7 @@
               </a:ln>
               <a:extLst>
                 <a:ext uri="{91240B29-F687-4f45-9708-019B960494DF}">
-                  <a14:hiddenLine xmlns="" xmlns:a14="http://schemas.microsoft.com/office/drawing/2010/main" w="9525">
+                  <a14:hiddenLine xmlns:a14="http://schemas.microsoft.com/office/drawing/2010/main" xmlns="" w="9525">
                     <a:solidFill>
                       <a:srgbClr val="000000"/>
                     </a:solidFill>
@@ -11358,7 +11358,7 @@
               </a:ln>
               <a:extLst>
                 <a:ext uri="{91240B29-F687-4f45-9708-019B960494DF}">
-                  <a14:hiddenLine xmlns="" xmlns:a14="http://schemas.microsoft.com/office/drawing/2010/main" w="9525">
+                  <a14:hiddenLine xmlns:a14="http://schemas.microsoft.com/office/drawing/2010/main" xmlns="" w="9525">
                     <a:solidFill>
                       <a:srgbClr val="000000"/>
                     </a:solidFill>
@@ -11423,7 +11423,7 @@
               </a:ln>
               <a:extLst>
                 <a:ext uri="{91240B29-F687-4f45-9708-019B960494DF}">
-                  <a14:hiddenLine xmlns="" xmlns:a14="http://schemas.microsoft.com/office/drawing/2010/main" w="9525">
+                  <a14:hiddenLine xmlns:a14="http://schemas.microsoft.com/office/drawing/2010/main" xmlns="" w="9525">
                     <a:solidFill>
                       <a:srgbClr val="000000"/>
                     </a:solidFill>
@@ -11543,7 +11543,7 @@
               </a:ln>
               <a:extLst>
                 <a:ext uri="{91240B29-F687-4f45-9708-019B960494DF}">
-                  <a14:hiddenLine xmlns="" xmlns:a14="http://schemas.microsoft.com/office/drawing/2010/main" w="9525">
+                  <a14:hiddenLine xmlns:a14="http://schemas.microsoft.com/office/drawing/2010/main" xmlns="" w="9525">
                     <a:solidFill>
                       <a:srgbClr val="000000"/>
                     </a:solidFill>
@@ -11624,7 +11624,7 @@
               </a:ln>
               <a:extLst>
                 <a:ext uri="{91240B29-F687-4f45-9708-019B960494DF}">
-                  <a14:hiddenLine xmlns="" xmlns:a14="http://schemas.microsoft.com/office/drawing/2010/main" w="9525">
+                  <a14:hiddenLine xmlns:a14="http://schemas.microsoft.com/office/drawing/2010/main" xmlns="" w="9525">
                     <a:solidFill>
                       <a:srgbClr val="000000"/>
                     </a:solidFill>
@@ -11739,7 +11739,7 @@
               </a:ln>
               <a:extLst>
                 <a:ext uri="{91240B29-F687-4f45-9708-019B960494DF}">
-                  <a14:hiddenLine xmlns="" xmlns:a14="http://schemas.microsoft.com/office/drawing/2010/main" w="9525">
+                  <a14:hiddenLine xmlns:a14="http://schemas.microsoft.com/office/drawing/2010/main" xmlns="" w="9525">
                     <a:solidFill>
                       <a:srgbClr val="000000"/>
                     </a:solidFill>
@@ -11829,7 +11829,7 @@
               </a:ln>
               <a:extLst>
                 <a:ext uri="{91240B29-F687-4f45-9708-019B960494DF}">
-                  <a14:hiddenLine xmlns="" xmlns:a14="http://schemas.microsoft.com/office/drawing/2010/main" w="9525">
+                  <a14:hiddenLine xmlns:a14="http://schemas.microsoft.com/office/drawing/2010/main" xmlns="" w="9525">
                     <a:solidFill>
                       <a:srgbClr val="000000"/>
                     </a:solidFill>
@@ -11894,7 +11894,7 @@
               </a:ln>
               <a:extLst>
                 <a:ext uri="{91240B29-F687-4f45-9708-019B960494DF}">
-                  <a14:hiddenLine xmlns="" xmlns:a14="http://schemas.microsoft.com/office/drawing/2010/main" w="9525">
+                  <a14:hiddenLine xmlns:a14="http://schemas.microsoft.com/office/drawing/2010/main" xmlns="" w="9525">
                     <a:solidFill>
                       <a:srgbClr val="000000"/>
                     </a:solidFill>
@@ -11984,7 +11984,7 @@
               </a:ln>
               <a:extLst>
                 <a:ext uri="{91240B29-F687-4f45-9708-019B960494DF}">
-                  <a14:hiddenLine xmlns="" xmlns:a14="http://schemas.microsoft.com/office/drawing/2010/main" w="9525">
+                  <a14:hiddenLine xmlns:a14="http://schemas.microsoft.com/office/drawing/2010/main" xmlns="" w="9525">
                     <a:solidFill>
                       <a:srgbClr val="000000"/>
                     </a:solidFill>
@@ -12052,7 +12052,7 @@
               </a:ln>
               <a:extLst>
                 <a:ext uri="{91240B29-F687-4f45-9708-019B960494DF}">
-                  <a14:hiddenLine xmlns="" xmlns:a14="http://schemas.microsoft.com/office/drawing/2010/main" w="9525">
+                  <a14:hiddenLine xmlns:a14="http://schemas.microsoft.com/office/drawing/2010/main" xmlns="" w="9525">
                     <a:solidFill>
                       <a:srgbClr val="000000"/>
                     </a:solidFill>
@@ -12142,7 +12142,7 @@
               </a:ln>
               <a:extLst>
                 <a:ext uri="{91240B29-F687-4f45-9708-019B960494DF}">
-                  <a14:hiddenLine xmlns="" xmlns:a14="http://schemas.microsoft.com/office/drawing/2010/main" w="9525">
+                  <a14:hiddenLine xmlns:a14="http://schemas.microsoft.com/office/drawing/2010/main" xmlns="" w="9525">
                     <a:solidFill>
                       <a:srgbClr val="000000"/>
                     </a:solidFill>
@@ -12210,7 +12210,7 @@
               </a:ln>
               <a:extLst>
                 <a:ext uri="{91240B29-F687-4f45-9708-019B960494DF}">
-                  <a14:hiddenLine xmlns="" xmlns:a14="http://schemas.microsoft.com/office/drawing/2010/main" w="9525">
+                  <a14:hiddenLine xmlns:a14="http://schemas.microsoft.com/office/drawing/2010/main" xmlns="" w="9525">
                     <a:solidFill>
                       <a:srgbClr val="000000"/>
                     </a:solidFill>
@@ -12300,7 +12300,7 @@
               </a:ln>
               <a:extLst>
                 <a:ext uri="{91240B29-F687-4f45-9708-019B960494DF}">
-                  <a14:hiddenLine xmlns="" xmlns:a14="http://schemas.microsoft.com/office/drawing/2010/main" w="9525">
+                  <a14:hiddenLine xmlns:a14="http://schemas.microsoft.com/office/drawing/2010/main" xmlns="" w="9525">
                     <a:solidFill>
                       <a:srgbClr val="000000"/>
                     </a:solidFill>
@@ -12334,7 +12334,7 @@
               </a:ln>
               <a:extLst>
                 <a:ext uri="{91240B29-F687-4f45-9708-019B960494DF}">
-                  <a14:hiddenLine xmlns="" xmlns:a14="http://schemas.microsoft.com/office/drawing/2010/main" w="9525">
+                  <a14:hiddenLine xmlns:a14="http://schemas.microsoft.com/office/drawing/2010/main" xmlns="" w="9525">
                     <a:solidFill>
                       <a:srgbClr val="000000"/>
                     </a:solidFill>
@@ -12474,7 +12474,7 @@
           <a:p>
             <a:fld id="{62DA8015-F4DF-264C-B6A2-A0129953FA2D}" type="datetime1">
               <a:rPr lang="en-US" smtClean="0"/>
-              <a:t>10/23/25</a:t>
+              <a:t>11/12/25</a:t>
             </a:fld>
             <a:endParaRPr lang="en-US"/>
           </a:p>
@@ -15112,7 +15112,7 @@
               <a:t>i</a:t>
             </a:r>
             <a:r>
-              <a:rPr lang="en-US" sz="1800" dirty="0">
+              <a:rPr lang="en-US" sz="1800">
                 <a:solidFill>
                   <a:schemeClr val="bg1"/>
                 </a:solidFill>
